--- a/Programacion II/Clases/Presentacion del Curso - Programacion II.pptx
+++ b/Programacion II/Clases/Presentacion del Curso - Programacion II.pptx
@@ -6482,7 +6482,7 @@
                 </a:solidFill>
                 <a:latin typeface="Calibri"/>
               </a:rPr>
-              <a:t>Quiz corto</a:t>
+              <a:t>cierre</a:t>
             </a:r>
             <a:r>
               <a:rPr sz="1600" b="0" i="0">
@@ -6500,7 +6500,7 @@
                 </a:solidFill>
                 <a:latin typeface="Calibri"/>
               </a:rPr>
-              <a:t>presencialidad asistida</a:t>
+              <a:t>Presencialidad asistida</a:t>
             </a:r>
             <a:r>
               <a:rPr sz="1600" b="0" i="0">
@@ -6509,7 +6509,61 @@
                 </a:solidFill>
                 <a:latin typeface="Calibri"/>
               </a:rPr>
-              <a:t> (dos semanas al mes la clase puede ser virtual).</a:t>
+              <a:t>: Clase 1 y parciales </a:t>
+            </a:r>
+            <a:r>
+              <a:rPr sz="1600" b="1" i="0">
+                <a:solidFill>
+                  <a:srgbClr val="333333"/>
+                </a:solidFill>
+                <a:latin typeface="Calibri"/>
+              </a:rPr>
+              <a:t>presencial</a:t>
+            </a:r>
+            <a:r>
+              <a:rPr sz="1600" b="0" i="0">
+                <a:solidFill>
+                  <a:srgbClr val="333333"/>
+                </a:solidFill>
+                <a:latin typeface="Calibri"/>
+              </a:rPr>
+              <a:t>; resto </a:t>
+            </a:r>
+            <a:r>
+              <a:rPr sz="1600" b="1" i="0">
+                <a:solidFill>
+                  <a:srgbClr val="333333"/>
+                </a:solidFill>
+                <a:latin typeface="Calibri"/>
+              </a:rPr>
+              <a:t>virtual síncrona</a:t>
+            </a:r>
+            <a:r>
+              <a:rPr sz="1600" b="0" i="0">
+                <a:solidFill>
+                  <a:srgbClr val="333333"/>
+                </a:solidFill>
+                <a:latin typeface="Calibri"/>
+              </a:rPr>
+              <a:t>; festivos = </a:t>
+            </a:r>
+            <a:r>
+              <a:rPr sz="1600" b="1" i="0">
+                <a:solidFill>
+                  <a:srgbClr val="333333"/>
+                </a:solidFill>
+                <a:latin typeface="Calibri"/>
+              </a:rPr>
+              <a:t>clase autónoma</a:t>
+            </a:r>
+            <a:r>
+              <a:rPr sz="1600" b="0" i="0">
+                <a:solidFill>
+                  <a:srgbClr val="333333"/>
+                </a:solidFill>
+                <a:latin typeface="Calibri"/>
+              </a:rPr>
+              <a:t>.</a:t>
             </a:r>
           </a:p>
           <a:p>

--- a/Programacion II/Clases/Presentacion del Curso - Programacion II.pptx
+++ b/Programacion II/Clases/Presentacion del Curso - Programacion II.pptx
@@ -7076,7 +7076,7 @@
                 </a:solidFill>
                 <a:latin typeface="Calibri"/>
               </a:rPr>
-              <a:t>–   Talleres / Quiz · 10%</a:t>
+              <a:t>–   Talleres o Quiz · 10%</a:t>
             </a:r>
           </a:p>
           <a:p>
@@ -7356,7 +7356,7 @@
                 </a:solidFill>
                 <a:latin typeface="Calibri"/>
               </a:rPr>
-              <a:t>–   Talleres / Quiz · 10%</a:t>
+              <a:t>–   Talleres o Quiz · 10%</a:t>
             </a:r>
           </a:p>
           <a:p>

--- a/Programacion II/Clases/Presentacion del Curso - Programacion II.pptx
+++ b/Programacion II/Clases/Presentacion del Curso - Programacion II.pptx
@@ -3414,56 +3414,6 @@
               <a:t>Docente: Julian Andres Castaño</a:t>
             </a:r>
           </a:p>
-          <a:p>
-            <a:pPr>
-              <a:spcAft>
-                <a:spcPts val="800"/>
-              </a:spcAft>
-            </a:pPr>
-            <a:r>
-              <a:rPr sz="1500" b="0" i="0">
-                <a:solidFill>
-                  <a:srgbClr val="333333"/>
-                </a:solidFill>
-                <a:latin typeface="Calibri"/>
-              </a:rPr>
-              <a:t>Campus Virtual: </a:t>
-            </a:r>
-            <a:r>
-              <a:rPr sz="1500" b="1" i="0">
-                <a:solidFill>
-                  <a:srgbClr val="333333"/>
-                </a:solidFill>
-                <a:latin typeface="Calibri"/>
-              </a:rPr>
-              <a:t>[URL Campus Virtual UNIAJC — pendiente]</a:t>
-            </a:r>
-          </a:p>
-          <a:p>
-            <a:pPr>
-              <a:spcAft>
-                <a:spcPts val="800"/>
-              </a:spcAft>
-            </a:pPr>
-            <a:r>
-              <a:rPr sz="1500" b="0" i="0">
-                <a:solidFill>
-                  <a:srgbClr val="333333"/>
-                </a:solidFill>
-                <a:latin typeface="Calibri"/>
-              </a:rPr>
-              <a:t>Listado de estudiantes: </a:t>
-            </a:r>
-            <a:r>
-              <a:rPr sz="1500" b="1" i="0">
-                <a:solidFill>
-                  <a:srgbClr val="333333"/>
-                </a:solidFill>
-                <a:latin typeface="Calibri"/>
-              </a:rPr>
-              <a:t>[PENDIENTE listado]</a:t>
-            </a:r>
-          </a:p>
         </p:txBody>
       </p:sp>
     </p:spTree>
@@ -3646,31 +3596,6 @@
                 </a:solidFill>
                 <a:latin typeface="Calibri"/>
               </a:rPr>
-              <a:t>–   Campus Virtual UNIAJC: </a:t>
-            </a:r>
-            <a:r>
-              <a:rPr sz="1600" b="1" i="0">
-                <a:solidFill>
-                  <a:srgbClr val="333333"/>
-                </a:solidFill>
-                <a:latin typeface="Calibri"/>
-              </a:rPr>
-              <a:t>[URL Campus Virtual UNIAJC — pendiente]</a:t>
-            </a:r>
-          </a:p>
-          <a:p>
-            <a:pPr>
-              <a:spcAft>
-                <a:spcPts val="800"/>
-              </a:spcAft>
-            </a:pPr>
-            <a:r>
-              <a:rPr sz="1600" b="0" i="0">
-                <a:solidFill>
-                  <a:srgbClr val="333333"/>
-                </a:solidFill>
-                <a:latin typeface="Calibri"/>
-              </a:rPr>
               <a:t>–   IDE recomendado: IntelliJ IDEA / VS Code / NetBeans (Java 17+).</a:t>
             </a:r>
           </a:p>
@@ -4298,7 +4223,7 @@
                 </a:solidFill>
                 <a:latin typeface="Calibri"/>
               </a:rPr>
-              <a:t>La asistencia tiene peso en cada corte (10% / 10% / 5%). Llega a tiempo y participa. Listado: [PENDIENTE listado].</a:t>
+              <a:t>La asistencia tiene peso en cada corte (10% / 10% / 5%). Llega a tiempo y participa.</a:t>
             </a:r>
           </a:p>
         </p:txBody>

--- a/Programacion II/Clases/Presentacion del Curso - Programacion II.pptx
+++ b/Programacion II/Clases/Presentacion del Curso - Programacion II.pptx
@@ -17,6 +17,7 @@
     <p:sldId id="265" r:id="rId16"/>
     <p:sldId id="266" r:id="rId17"/>
     <p:sldId id="267" r:id="rId18"/>
+    <p:sldId id="268" r:id="rId19"/>
   </p:sldIdLst>
   <p:sldSz cx="12191695" cy="6858000" type="screen4x3"/>
   <p:notesSz cx="6858000" cy="9144000"/>
@@ -3612,6 +3613,40 @@
                 </a:solidFill>
                 <a:latin typeface="Calibri"/>
               </a:rPr>
+              <a:t>–   </a:t>
+            </a:r>
+            <a:r>
+              <a:rPr sz="1600" b="1" i="0">
+                <a:solidFill>
+                  <a:srgbClr val="333333"/>
+                </a:solidFill>
+                <a:latin typeface="Calibri"/>
+              </a:rPr>
+              <a:t>ExamLab</a:t>
+            </a:r>
+            <a:r>
+              <a:rPr sz="1600" b="0" i="0">
+                <a:solidFill>
+                  <a:srgbClr val="333333"/>
+                </a:solidFill>
+                <a:latin typeface="Calibri"/>
+              </a:rPr>
+              <a:t> (https://examlab.lovable.app/): entrega de talleres + quices/parciales del curso.</a:t>
+            </a:r>
+          </a:p>
+          <a:p>
+            <a:pPr>
+              <a:spcAft>
+                <a:spcPts val="800"/>
+              </a:spcAft>
+            </a:pPr>
+            <a:r>
+              <a:rPr sz="1600" b="0" i="0">
+                <a:solidFill>
+                  <a:srgbClr val="333333"/>
+                </a:solidFill>
+                <a:latin typeface="Calibri"/>
+              </a:rPr>
               <a:t>–   Bibliografía (microcurrículo): Deitel &amp; Deitel · Design Patterns (GoF) · Head First Design Patterns · JavaFX Docs.</a:t>
             </a:r>
           </a:p>
@@ -4085,7 +4120,7 @@
                 </a:solidFill>
                 <a:latin typeface="Calibri"/>
               </a:rPr>
-              <a:t>Los talleres guiados se entregan a más tardar el domingo 23:59 de la semana correspondiente.</a:t>
+              <a:t>Los talleres guiados se entregan en ExamLab (https://examlab.lovable.app/) a más tardar el domingo 23:59 de la semana correspondiente.</a:t>
             </a:r>
           </a:p>
         </p:txBody>
@@ -4298,6 +4333,1241 @@
         <p:spPr>
           <a:xfrm>
             <a:off x="0" y="0"/>
+            <a:ext cx="12191695" cy="1170432"/>
+          </a:xfrm>
+          <a:prstGeom prst="rect">
+            <a:avLst/>
+          </a:prstGeom>
+          <a:solidFill>
+            <a:srgbClr val="095292"/>
+          </a:solidFill>
+          <a:ln>
+            <a:noFill/>
+          </a:ln>
+        </p:spPr>
+        <p:style>
+          <a:lnRef idx="1">
+            <a:schemeClr val="accent1"/>
+          </a:lnRef>
+          <a:fillRef idx="3">
+            <a:schemeClr val="accent1"/>
+          </a:fillRef>
+          <a:effectRef idx="2">
+            <a:schemeClr val="accent1"/>
+          </a:effectRef>
+          <a:fontRef idx="minor">
+            <a:schemeClr val="lt1"/>
+          </a:fontRef>
+        </p:style>
+        <p:txBody>
+          <a:bodyPr rtlCol="0" anchor="ctr"/>
+          <a:lstStyle/>
+          <a:p>
+            <a:pPr algn="ctr"/>
+          </a:p>
+        </p:txBody>
+      </p:sp>
+      <p:sp>
+        <p:nvSpPr>
+          <p:cNvPr id="3" name="Rectangle 2"/>
+          <p:cNvSpPr/>
+          <p:nvPr/>
+        </p:nvSpPr>
+        <p:spPr>
+          <a:xfrm>
+            <a:off x="0" y="1170432"/>
+            <a:ext cx="12191695" cy="41148"/>
+          </a:xfrm>
+          <a:prstGeom prst="rect">
+            <a:avLst/>
+          </a:prstGeom>
+          <a:solidFill>
+            <a:srgbClr val="FFD000"/>
+          </a:solidFill>
+          <a:ln>
+            <a:noFill/>
+          </a:ln>
+        </p:spPr>
+        <p:style>
+          <a:lnRef idx="1">
+            <a:schemeClr val="accent1"/>
+          </a:lnRef>
+          <a:fillRef idx="3">
+            <a:schemeClr val="accent1"/>
+          </a:fillRef>
+          <a:effectRef idx="2">
+            <a:schemeClr val="accent1"/>
+          </a:effectRef>
+          <a:fontRef idx="minor">
+            <a:schemeClr val="lt1"/>
+          </a:fontRef>
+        </p:style>
+        <p:txBody>
+          <a:bodyPr rtlCol="0" anchor="ctr"/>
+          <a:lstStyle/>
+          <a:p>
+            <a:pPr algn="ctr"/>
+          </a:p>
+        </p:txBody>
+      </p:sp>
+      <p:sp>
+        <p:nvSpPr>
+          <p:cNvPr id="4" name="TextBox 3"/>
+          <p:cNvSpPr txBox="1"/>
+          <p:nvPr/>
+        </p:nvSpPr>
+        <p:spPr>
+          <a:xfrm>
+            <a:off x="457200" y="164592"/>
+            <a:ext cx="11277295" cy="384048"/>
+          </a:xfrm>
+          <a:prstGeom prst="rect">
+            <a:avLst/>
+          </a:prstGeom>
+          <a:noFill/>
+        </p:spPr>
+        <p:txBody>
+          <a:bodyPr wrap="square">
+            <a:spAutoFit/>
+          </a:bodyPr>
+          <a:lstStyle/>
+          <a:p>
+            <a:r>
+              <a:rPr sz="2600" b="1" i="0">
+                <a:solidFill>
+                  <a:srgbClr val="FFFFFF"/>
+                </a:solidFill>
+                <a:latin typeface="Calibri"/>
+              </a:rPr>
+              <a:t>Herramientas del curso</a:t>
+            </a:r>
+          </a:p>
+        </p:txBody>
+      </p:sp>
+      <p:sp>
+        <p:nvSpPr>
+          <p:cNvPr id="5" name="TextBox 4"/>
+          <p:cNvSpPr txBox="1"/>
+          <p:nvPr/>
+        </p:nvSpPr>
+        <p:spPr>
+          <a:xfrm>
+            <a:off x="457200" y="566928"/>
+            <a:ext cx="11277295" cy="411480"/>
+          </a:xfrm>
+          <a:prstGeom prst="rect">
+            <a:avLst/>
+          </a:prstGeom>
+          <a:noFill/>
+        </p:spPr>
+        <p:txBody>
+          <a:bodyPr wrap="square">
+            <a:spAutoFit/>
+          </a:bodyPr>
+          <a:lstStyle/>
+          <a:p>
+            <a:r>
+              <a:rPr sz="1400" b="0" i="0">
+                <a:solidFill>
+                  <a:srgbClr val="B8D8EE"/>
+                </a:solidFill>
+                <a:latin typeface="Calibri"/>
+              </a:rPr>
+              <a:t>Gratis · IDE a elección · entrega/evaluación</a:t>
+            </a:r>
+          </a:p>
+        </p:txBody>
+      </p:sp>
+      <p:sp>
+        <p:nvSpPr>
+          <p:cNvPr id="6" name="Rounded Rectangle 5"/>
+          <p:cNvSpPr/>
+          <p:nvPr/>
+        </p:nvSpPr>
+        <p:spPr>
+          <a:xfrm>
+            <a:off x="457200" y="1591056"/>
+            <a:ext cx="3624986" cy="2299716"/>
+          </a:xfrm>
+          <a:prstGeom prst="roundRect">
+            <a:avLst>
+              <a:gd name="adj" fmla="val 12000"/>
+            </a:avLst>
+          </a:prstGeom>
+          <a:solidFill>
+            <a:srgbClr val="F2F2F2"/>
+          </a:solidFill>
+          <a:ln>
+            <a:noFill/>
+          </a:ln>
+        </p:spPr>
+        <p:style>
+          <a:lnRef idx="1">
+            <a:schemeClr val="accent1"/>
+          </a:lnRef>
+          <a:fillRef idx="3">
+            <a:schemeClr val="accent1"/>
+          </a:fillRef>
+          <a:effectRef idx="2">
+            <a:schemeClr val="accent1"/>
+          </a:effectRef>
+          <a:fontRef idx="minor">
+            <a:schemeClr val="lt1"/>
+          </a:fontRef>
+        </p:style>
+        <p:txBody>
+          <a:bodyPr rtlCol="0" anchor="ctr"/>
+          <a:lstStyle/>
+          <a:p>
+            <a:pPr algn="ctr"/>
+          </a:p>
+        </p:txBody>
+      </p:sp>
+      <p:sp>
+        <p:nvSpPr>
+          <p:cNvPr id="7" name="Rectangle 6"/>
+          <p:cNvSpPr/>
+          <p:nvPr/>
+        </p:nvSpPr>
+        <p:spPr>
+          <a:xfrm>
+            <a:off x="457200" y="1591056"/>
+            <a:ext cx="3624986" cy="64008"/>
+          </a:xfrm>
+          <a:prstGeom prst="rect">
+            <a:avLst/>
+          </a:prstGeom>
+          <a:solidFill>
+            <a:srgbClr val="095292"/>
+          </a:solidFill>
+          <a:ln>
+            <a:noFill/>
+          </a:ln>
+        </p:spPr>
+        <p:style>
+          <a:lnRef idx="1">
+            <a:schemeClr val="accent1"/>
+          </a:lnRef>
+          <a:fillRef idx="3">
+            <a:schemeClr val="accent1"/>
+          </a:fillRef>
+          <a:effectRef idx="2">
+            <a:schemeClr val="accent1"/>
+          </a:effectRef>
+          <a:fontRef idx="minor">
+            <a:schemeClr val="lt1"/>
+          </a:fontRef>
+        </p:style>
+        <p:txBody>
+          <a:bodyPr rtlCol="0" anchor="ctr"/>
+          <a:lstStyle/>
+          <a:p>
+            <a:pPr algn="ctr"/>
+          </a:p>
+        </p:txBody>
+      </p:sp>
+      <p:sp>
+        <p:nvSpPr>
+          <p:cNvPr id="8" name="Rectangle 7"/>
+          <p:cNvSpPr/>
+          <p:nvPr/>
+        </p:nvSpPr>
+        <p:spPr>
+          <a:xfrm>
+            <a:off x="457200" y="1655064"/>
+            <a:ext cx="3624986" cy="27432"/>
+          </a:xfrm>
+          <a:prstGeom prst="rect">
+            <a:avLst/>
+          </a:prstGeom>
+          <a:solidFill>
+            <a:srgbClr val="FFD000"/>
+          </a:solidFill>
+          <a:ln>
+            <a:noFill/>
+          </a:ln>
+        </p:spPr>
+        <p:style>
+          <a:lnRef idx="1">
+            <a:schemeClr val="accent1"/>
+          </a:lnRef>
+          <a:fillRef idx="3">
+            <a:schemeClr val="accent1"/>
+          </a:fillRef>
+          <a:effectRef idx="2">
+            <a:schemeClr val="accent1"/>
+          </a:effectRef>
+          <a:fontRef idx="minor">
+            <a:schemeClr val="lt1"/>
+          </a:fontRef>
+        </p:style>
+        <p:txBody>
+          <a:bodyPr rtlCol="0" anchor="ctr"/>
+          <a:lstStyle/>
+          <a:p>
+            <a:pPr algn="ctr"/>
+          </a:p>
+        </p:txBody>
+      </p:sp>
+      <p:pic>
+        <p:nvPicPr>
+          <p:cNvPr id="9" name="Picture 8" descr="intellij.png"/>
+          <p:cNvPicPr>
+            <a:picLocks noChangeAspect="1"/>
+          </p:cNvPicPr>
+          <p:nvPr/>
+        </p:nvPicPr>
+        <p:blipFill>
+          <a:blip r:embed="rId2"/>
+          <a:stretch>
+            <a:fillRect/>
+          </a:stretch>
+        </p:blipFill>
+        <p:spPr>
+          <a:xfrm>
+            <a:off x="1743913" y="1792224"/>
+            <a:ext cx="1051560" cy="1051560"/>
+          </a:xfrm>
+          <a:prstGeom prst="rect">
+            <a:avLst/>
+          </a:prstGeom>
+        </p:spPr>
+      </p:pic>
+      <p:sp>
+        <p:nvSpPr>
+          <p:cNvPr id="10" name="TextBox 9"/>
+          <p:cNvSpPr txBox="1"/>
+          <p:nvPr/>
+        </p:nvSpPr>
+        <p:spPr>
+          <a:xfrm>
+            <a:off x="530352" y="2916936"/>
+            <a:ext cx="3478682" cy="502920"/>
+          </a:xfrm>
+          <a:prstGeom prst="rect">
+            <a:avLst/>
+          </a:prstGeom>
+          <a:noFill/>
+        </p:spPr>
+        <p:txBody>
+          <a:bodyPr wrap="square" anchor="t"/>
+          <a:lstStyle/>
+          <a:p>
+            <a:pPr algn="ctr"/>
+            <a:r>
+              <a:rPr sz="1300" b="1" i="0">
+                <a:solidFill>
+                  <a:srgbClr val="095292"/>
+                </a:solidFill>
+                <a:latin typeface="Calibri"/>
+              </a:rPr>
+              <a:t>IntelliJ IDEA</a:t>
+            </a:r>
+          </a:p>
+          <a:p>
+            <a:pPr algn="ctr">
+              <a:spcBef>
+                <a:spcPts val="200"/>
+              </a:spcBef>
+            </a:pPr>
+            <a:r>
+              <a:rPr sz="1000" b="0" i="0">
+                <a:solidFill>
+                  <a:srgbClr val="666666"/>
+                </a:solidFill>
+                <a:latin typeface="Calibri"/>
+              </a:rPr>
+              <a:t>IDE recomendado</a:t>
+            </a:r>
+          </a:p>
+        </p:txBody>
+      </p:sp>
+      <p:sp>
+        <p:nvSpPr>
+          <p:cNvPr id="11" name="Rounded Rectangle 10"/>
+          <p:cNvSpPr/>
+          <p:nvPr/>
+        </p:nvSpPr>
+        <p:spPr>
+          <a:xfrm>
+            <a:off x="4283354" y="1591056"/>
+            <a:ext cx="3624986" cy="2299716"/>
+          </a:xfrm>
+          <a:prstGeom prst="roundRect">
+            <a:avLst>
+              <a:gd name="adj" fmla="val 12000"/>
+            </a:avLst>
+          </a:prstGeom>
+          <a:solidFill>
+            <a:srgbClr val="F2F2F2"/>
+          </a:solidFill>
+          <a:ln>
+            <a:noFill/>
+          </a:ln>
+        </p:spPr>
+        <p:style>
+          <a:lnRef idx="1">
+            <a:schemeClr val="accent1"/>
+          </a:lnRef>
+          <a:fillRef idx="3">
+            <a:schemeClr val="accent1"/>
+          </a:fillRef>
+          <a:effectRef idx="2">
+            <a:schemeClr val="accent1"/>
+          </a:effectRef>
+          <a:fontRef idx="minor">
+            <a:schemeClr val="lt1"/>
+          </a:fontRef>
+        </p:style>
+        <p:txBody>
+          <a:bodyPr rtlCol="0" anchor="ctr"/>
+          <a:lstStyle/>
+          <a:p>
+            <a:pPr algn="ctr"/>
+          </a:p>
+        </p:txBody>
+      </p:sp>
+      <p:sp>
+        <p:nvSpPr>
+          <p:cNvPr id="12" name="Rectangle 11"/>
+          <p:cNvSpPr/>
+          <p:nvPr/>
+        </p:nvSpPr>
+        <p:spPr>
+          <a:xfrm>
+            <a:off x="4283354" y="1591056"/>
+            <a:ext cx="3624986" cy="64008"/>
+          </a:xfrm>
+          <a:prstGeom prst="rect">
+            <a:avLst/>
+          </a:prstGeom>
+          <a:solidFill>
+            <a:srgbClr val="095292"/>
+          </a:solidFill>
+          <a:ln>
+            <a:noFill/>
+          </a:ln>
+        </p:spPr>
+        <p:style>
+          <a:lnRef idx="1">
+            <a:schemeClr val="accent1"/>
+          </a:lnRef>
+          <a:fillRef idx="3">
+            <a:schemeClr val="accent1"/>
+          </a:fillRef>
+          <a:effectRef idx="2">
+            <a:schemeClr val="accent1"/>
+          </a:effectRef>
+          <a:fontRef idx="minor">
+            <a:schemeClr val="lt1"/>
+          </a:fontRef>
+        </p:style>
+        <p:txBody>
+          <a:bodyPr rtlCol="0" anchor="ctr"/>
+          <a:lstStyle/>
+          <a:p>
+            <a:pPr algn="ctr"/>
+          </a:p>
+        </p:txBody>
+      </p:sp>
+      <p:sp>
+        <p:nvSpPr>
+          <p:cNvPr id="13" name="Rectangle 12"/>
+          <p:cNvSpPr/>
+          <p:nvPr/>
+        </p:nvSpPr>
+        <p:spPr>
+          <a:xfrm>
+            <a:off x="4283354" y="1655064"/>
+            <a:ext cx="3624986" cy="27432"/>
+          </a:xfrm>
+          <a:prstGeom prst="rect">
+            <a:avLst/>
+          </a:prstGeom>
+          <a:solidFill>
+            <a:srgbClr val="FFD000"/>
+          </a:solidFill>
+          <a:ln>
+            <a:noFill/>
+          </a:ln>
+        </p:spPr>
+        <p:style>
+          <a:lnRef idx="1">
+            <a:schemeClr val="accent1"/>
+          </a:lnRef>
+          <a:fillRef idx="3">
+            <a:schemeClr val="accent1"/>
+          </a:fillRef>
+          <a:effectRef idx="2">
+            <a:schemeClr val="accent1"/>
+          </a:effectRef>
+          <a:fontRef idx="minor">
+            <a:schemeClr val="lt1"/>
+          </a:fontRef>
+        </p:style>
+        <p:txBody>
+          <a:bodyPr rtlCol="0" anchor="ctr"/>
+          <a:lstStyle/>
+          <a:p>
+            <a:pPr algn="ctr"/>
+          </a:p>
+        </p:txBody>
+      </p:sp>
+      <p:pic>
+        <p:nvPicPr>
+          <p:cNvPr id="14" name="Picture 13" descr="vscode.png"/>
+          <p:cNvPicPr>
+            <a:picLocks noChangeAspect="1"/>
+          </p:cNvPicPr>
+          <p:nvPr/>
+        </p:nvPicPr>
+        <p:blipFill>
+          <a:blip r:embed="rId3"/>
+          <a:stretch>
+            <a:fillRect/>
+          </a:stretch>
+        </p:blipFill>
+        <p:spPr>
+          <a:xfrm>
+            <a:off x="5570067" y="1792224"/>
+            <a:ext cx="1051560" cy="1051560"/>
+          </a:xfrm>
+          <a:prstGeom prst="rect">
+            <a:avLst/>
+          </a:prstGeom>
+        </p:spPr>
+      </p:pic>
+      <p:sp>
+        <p:nvSpPr>
+          <p:cNvPr id="15" name="TextBox 14"/>
+          <p:cNvSpPr txBox="1"/>
+          <p:nvPr/>
+        </p:nvSpPr>
+        <p:spPr>
+          <a:xfrm>
+            <a:off x="4356506" y="2916936"/>
+            <a:ext cx="3478682" cy="502920"/>
+          </a:xfrm>
+          <a:prstGeom prst="rect">
+            <a:avLst/>
+          </a:prstGeom>
+          <a:noFill/>
+        </p:spPr>
+        <p:txBody>
+          <a:bodyPr wrap="square" anchor="t"/>
+          <a:lstStyle/>
+          <a:p>
+            <a:pPr algn="ctr"/>
+            <a:r>
+              <a:rPr sz="1300" b="1" i="0">
+                <a:solidFill>
+                  <a:srgbClr val="095292"/>
+                </a:solidFill>
+                <a:latin typeface="Calibri"/>
+              </a:rPr>
+              <a:t>VS Code</a:t>
+            </a:r>
+          </a:p>
+          <a:p>
+            <a:pPr algn="ctr">
+              <a:spcBef>
+                <a:spcPts val="200"/>
+              </a:spcBef>
+            </a:pPr>
+            <a:r>
+              <a:rPr sz="1000" b="0" i="0">
+                <a:solidFill>
+                  <a:srgbClr val="666666"/>
+                </a:solidFill>
+                <a:latin typeface="Calibri"/>
+              </a:rPr>
+              <a:t>IDE alterno</a:t>
+            </a:r>
+          </a:p>
+        </p:txBody>
+      </p:sp>
+      <p:sp>
+        <p:nvSpPr>
+          <p:cNvPr id="16" name="Rounded Rectangle 15"/>
+          <p:cNvSpPr/>
+          <p:nvPr/>
+        </p:nvSpPr>
+        <p:spPr>
+          <a:xfrm>
+            <a:off x="8109508" y="1591056"/>
+            <a:ext cx="3624986" cy="2299716"/>
+          </a:xfrm>
+          <a:prstGeom prst="roundRect">
+            <a:avLst>
+              <a:gd name="adj" fmla="val 12000"/>
+            </a:avLst>
+          </a:prstGeom>
+          <a:solidFill>
+            <a:srgbClr val="F2F2F2"/>
+          </a:solidFill>
+          <a:ln>
+            <a:noFill/>
+          </a:ln>
+        </p:spPr>
+        <p:style>
+          <a:lnRef idx="1">
+            <a:schemeClr val="accent1"/>
+          </a:lnRef>
+          <a:fillRef idx="3">
+            <a:schemeClr val="accent1"/>
+          </a:fillRef>
+          <a:effectRef idx="2">
+            <a:schemeClr val="accent1"/>
+          </a:effectRef>
+          <a:fontRef idx="minor">
+            <a:schemeClr val="lt1"/>
+          </a:fontRef>
+        </p:style>
+        <p:txBody>
+          <a:bodyPr rtlCol="0" anchor="ctr"/>
+          <a:lstStyle/>
+          <a:p>
+            <a:pPr algn="ctr"/>
+          </a:p>
+        </p:txBody>
+      </p:sp>
+      <p:sp>
+        <p:nvSpPr>
+          <p:cNvPr id="17" name="Rectangle 16"/>
+          <p:cNvSpPr/>
+          <p:nvPr/>
+        </p:nvSpPr>
+        <p:spPr>
+          <a:xfrm>
+            <a:off x="8109508" y="1591056"/>
+            <a:ext cx="3624986" cy="64008"/>
+          </a:xfrm>
+          <a:prstGeom prst="rect">
+            <a:avLst/>
+          </a:prstGeom>
+          <a:solidFill>
+            <a:srgbClr val="095292"/>
+          </a:solidFill>
+          <a:ln>
+            <a:noFill/>
+          </a:ln>
+        </p:spPr>
+        <p:style>
+          <a:lnRef idx="1">
+            <a:schemeClr val="accent1"/>
+          </a:lnRef>
+          <a:fillRef idx="3">
+            <a:schemeClr val="accent1"/>
+          </a:fillRef>
+          <a:effectRef idx="2">
+            <a:schemeClr val="accent1"/>
+          </a:effectRef>
+          <a:fontRef idx="minor">
+            <a:schemeClr val="lt1"/>
+          </a:fontRef>
+        </p:style>
+        <p:txBody>
+          <a:bodyPr rtlCol="0" anchor="ctr"/>
+          <a:lstStyle/>
+          <a:p>
+            <a:pPr algn="ctr"/>
+          </a:p>
+        </p:txBody>
+      </p:sp>
+      <p:sp>
+        <p:nvSpPr>
+          <p:cNvPr id="18" name="Rectangle 17"/>
+          <p:cNvSpPr/>
+          <p:nvPr/>
+        </p:nvSpPr>
+        <p:spPr>
+          <a:xfrm>
+            <a:off x="8109508" y="1655064"/>
+            <a:ext cx="3624986" cy="27432"/>
+          </a:xfrm>
+          <a:prstGeom prst="rect">
+            <a:avLst/>
+          </a:prstGeom>
+          <a:solidFill>
+            <a:srgbClr val="FFD000"/>
+          </a:solidFill>
+          <a:ln>
+            <a:noFill/>
+          </a:ln>
+        </p:spPr>
+        <p:style>
+          <a:lnRef idx="1">
+            <a:schemeClr val="accent1"/>
+          </a:lnRef>
+          <a:fillRef idx="3">
+            <a:schemeClr val="accent1"/>
+          </a:fillRef>
+          <a:effectRef idx="2">
+            <a:schemeClr val="accent1"/>
+          </a:effectRef>
+          <a:fontRef idx="minor">
+            <a:schemeClr val="lt1"/>
+          </a:fontRef>
+        </p:style>
+        <p:txBody>
+          <a:bodyPr rtlCol="0" anchor="ctr"/>
+          <a:lstStyle/>
+          <a:p>
+            <a:pPr algn="ctr"/>
+          </a:p>
+        </p:txBody>
+      </p:sp>
+      <p:pic>
+        <p:nvPicPr>
+          <p:cNvPr id="19" name="Picture 18" descr="netbeans.png"/>
+          <p:cNvPicPr>
+            <a:picLocks noChangeAspect="1"/>
+          </p:cNvPicPr>
+          <p:nvPr/>
+        </p:nvPicPr>
+        <p:blipFill>
+          <a:blip r:embed="rId4"/>
+          <a:stretch>
+            <a:fillRect/>
+          </a:stretch>
+        </p:blipFill>
+        <p:spPr>
+          <a:xfrm>
+            <a:off x="9396222" y="1792224"/>
+            <a:ext cx="1051560" cy="1051560"/>
+          </a:xfrm>
+          <a:prstGeom prst="rect">
+            <a:avLst/>
+          </a:prstGeom>
+        </p:spPr>
+      </p:pic>
+      <p:sp>
+        <p:nvSpPr>
+          <p:cNvPr id="20" name="TextBox 19"/>
+          <p:cNvSpPr txBox="1"/>
+          <p:nvPr/>
+        </p:nvSpPr>
+        <p:spPr>
+          <a:xfrm>
+            <a:off x="8182660" y="2916936"/>
+            <a:ext cx="3478682" cy="502920"/>
+          </a:xfrm>
+          <a:prstGeom prst="rect">
+            <a:avLst/>
+          </a:prstGeom>
+          <a:noFill/>
+        </p:spPr>
+        <p:txBody>
+          <a:bodyPr wrap="square" anchor="t"/>
+          <a:lstStyle/>
+          <a:p>
+            <a:pPr algn="ctr"/>
+            <a:r>
+              <a:rPr sz="1300" b="1" i="0">
+                <a:solidFill>
+                  <a:srgbClr val="095292"/>
+                </a:solidFill>
+                <a:latin typeface="Calibri"/>
+              </a:rPr>
+              <a:t>NetBeans</a:t>
+            </a:r>
+          </a:p>
+          <a:p>
+            <a:pPr algn="ctr">
+              <a:spcBef>
+                <a:spcPts val="200"/>
+              </a:spcBef>
+            </a:pPr>
+            <a:r>
+              <a:rPr sz="1000" b="0" i="0">
+                <a:solidFill>
+                  <a:srgbClr val="666666"/>
+                </a:solidFill>
+                <a:latin typeface="Calibri"/>
+              </a:rPr>
+              <a:t>IDE alterno</a:t>
+            </a:r>
+          </a:p>
+        </p:txBody>
+      </p:sp>
+      <p:sp>
+        <p:nvSpPr>
+          <p:cNvPr id="21" name="Rounded Rectangle 20"/>
+          <p:cNvSpPr/>
+          <p:nvPr/>
+        </p:nvSpPr>
+        <p:spPr>
+          <a:xfrm>
+            <a:off x="457200" y="4055364"/>
+            <a:ext cx="3624986" cy="2299716"/>
+          </a:xfrm>
+          <a:prstGeom prst="roundRect">
+            <a:avLst>
+              <a:gd name="adj" fmla="val 12000"/>
+            </a:avLst>
+          </a:prstGeom>
+          <a:solidFill>
+            <a:srgbClr val="F2F2F2"/>
+          </a:solidFill>
+          <a:ln>
+            <a:noFill/>
+          </a:ln>
+        </p:spPr>
+        <p:style>
+          <a:lnRef idx="1">
+            <a:schemeClr val="accent1"/>
+          </a:lnRef>
+          <a:fillRef idx="3">
+            <a:schemeClr val="accent1"/>
+          </a:fillRef>
+          <a:effectRef idx="2">
+            <a:schemeClr val="accent1"/>
+          </a:effectRef>
+          <a:fontRef idx="minor">
+            <a:schemeClr val="lt1"/>
+          </a:fontRef>
+        </p:style>
+        <p:txBody>
+          <a:bodyPr rtlCol="0" anchor="ctr"/>
+          <a:lstStyle/>
+          <a:p>
+            <a:pPr algn="ctr"/>
+          </a:p>
+        </p:txBody>
+      </p:sp>
+      <p:sp>
+        <p:nvSpPr>
+          <p:cNvPr id="22" name="Rectangle 21"/>
+          <p:cNvSpPr/>
+          <p:nvPr/>
+        </p:nvSpPr>
+        <p:spPr>
+          <a:xfrm>
+            <a:off x="457200" y="4055364"/>
+            <a:ext cx="3624986" cy="64008"/>
+          </a:xfrm>
+          <a:prstGeom prst="rect">
+            <a:avLst/>
+          </a:prstGeom>
+          <a:solidFill>
+            <a:srgbClr val="095292"/>
+          </a:solidFill>
+          <a:ln>
+            <a:noFill/>
+          </a:ln>
+        </p:spPr>
+        <p:style>
+          <a:lnRef idx="1">
+            <a:schemeClr val="accent1"/>
+          </a:lnRef>
+          <a:fillRef idx="3">
+            <a:schemeClr val="accent1"/>
+          </a:fillRef>
+          <a:effectRef idx="2">
+            <a:schemeClr val="accent1"/>
+          </a:effectRef>
+          <a:fontRef idx="minor">
+            <a:schemeClr val="lt1"/>
+          </a:fontRef>
+        </p:style>
+        <p:txBody>
+          <a:bodyPr rtlCol="0" anchor="ctr"/>
+          <a:lstStyle/>
+          <a:p>
+            <a:pPr algn="ctr"/>
+          </a:p>
+        </p:txBody>
+      </p:sp>
+      <p:sp>
+        <p:nvSpPr>
+          <p:cNvPr id="23" name="Rectangle 22"/>
+          <p:cNvSpPr/>
+          <p:nvPr/>
+        </p:nvSpPr>
+        <p:spPr>
+          <a:xfrm>
+            <a:off x="457200" y="4119372"/>
+            <a:ext cx="3624986" cy="27432"/>
+          </a:xfrm>
+          <a:prstGeom prst="rect">
+            <a:avLst/>
+          </a:prstGeom>
+          <a:solidFill>
+            <a:srgbClr val="FFD000"/>
+          </a:solidFill>
+          <a:ln>
+            <a:noFill/>
+          </a:ln>
+        </p:spPr>
+        <p:style>
+          <a:lnRef idx="1">
+            <a:schemeClr val="accent1"/>
+          </a:lnRef>
+          <a:fillRef idx="3">
+            <a:schemeClr val="accent1"/>
+          </a:fillRef>
+          <a:effectRef idx="2">
+            <a:schemeClr val="accent1"/>
+          </a:effectRef>
+          <a:fontRef idx="minor">
+            <a:schemeClr val="lt1"/>
+          </a:fontRef>
+        </p:style>
+        <p:txBody>
+          <a:bodyPr rtlCol="0" anchor="ctr"/>
+          <a:lstStyle/>
+          <a:p>
+            <a:pPr algn="ctr"/>
+          </a:p>
+        </p:txBody>
+      </p:sp>
+      <p:pic>
+        <p:nvPicPr>
+          <p:cNvPr id="24" name="Picture 23" descr="java.png"/>
+          <p:cNvPicPr>
+            <a:picLocks noChangeAspect="1"/>
+          </p:cNvPicPr>
+          <p:nvPr/>
+        </p:nvPicPr>
+        <p:blipFill>
+          <a:blip r:embed="rId5"/>
+          <a:stretch>
+            <a:fillRect/>
+          </a:stretch>
+        </p:blipFill>
+        <p:spPr>
+          <a:xfrm>
+            <a:off x="1743913" y="4256532"/>
+            <a:ext cx="1051560" cy="1051560"/>
+          </a:xfrm>
+          <a:prstGeom prst="rect">
+            <a:avLst/>
+          </a:prstGeom>
+        </p:spPr>
+      </p:pic>
+      <p:sp>
+        <p:nvSpPr>
+          <p:cNvPr id="25" name="TextBox 24"/>
+          <p:cNvSpPr txBox="1"/>
+          <p:nvPr/>
+        </p:nvSpPr>
+        <p:spPr>
+          <a:xfrm>
+            <a:off x="530352" y="5381244"/>
+            <a:ext cx="3478682" cy="502920"/>
+          </a:xfrm>
+          <a:prstGeom prst="rect">
+            <a:avLst/>
+          </a:prstGeom>
+          <a:noFill/>
+        </p:spPr>
+        <p:txBody>
+          <a:bodyPr wrap="square" anchor="t"/>
+          <a:lstStyle/>
+          <a:p>
+            <a:pPr algn="ctr"/>
+            <a:r>
+              <a:rPr sz="1300" b="1" i="0">
+                <a:solidFill>
+                  <a:srgbClr val="095292"/>
+                </a:solidFill>
+                <a:latin typeface="Calibri"/>
+              </a:rPr>
+              <a:t>Java</a:t>
+            </a:r>
+          </a:p>
+          <a:p>
+            <a:pPr algn="ctr">
+              <a:spcBef>
+                <a:spcPts val="200"/>
+              </a:spcBef>
+            </a:pPr>
+            <a:r>
+              <a:rPr sz="1000" b="0" i="0">
+                <a:solidFill>
+                  <a:srgbClr val="666666"/>
+                </a:solidFill>
+                <a:latin typeface="Calibri"/>
+              </a:rPr>
+              <a:t>JDK 17+</a:t>
+            </a:r>
+          </a:p>
+        </p:txBody>
+      </p:sp>
+      <p:sp>
+        <p:nvSpPr>
+          <p:cNvPr id="26" name="Rounded Rectangle 25"/>
+          <p:cNvSpPr/>
+          <p:nvPr/>
+        </p:nvSpPr>
+        <p:spPr>
+          <a:xfrm>
+            <a:off x="4283354" y="4055364"/>
+            <a:ext cx="3624986" cy="2299716"/>
+          </a:xfrm>
+          <a:prstGeom prst="roundRect">
+            <a:avLst>
+              <a:gd name="adj" fmla="val 12000"/>
+            </a:avLst>
+          </a:prstGeom>
+          <a:solidFill>
+            <a:srgbClr val="F2F2F2"/>
+          </a:solidFill>
+          <a:ln>
+            <a:noFill/>
+          </a:ln>
+        </p:spPr>
+        <p:style>
+          <a:lnRef idx="1">
+            <a:schemeClr val="accent1"/>
+          </a:lnRef>
+          <a:fillRef idx="3">
+            <a:schemeClr val="accent1"/>
+          </a:fillRef>
+          <a:effectRef idx="2">
+            <a:schemeClr val="accent1"/>
+          </a:effectRef>
+          <a:fontRef idx="minor">
+            <a:schemeClr val="lt1"/>
+          </a:fontRef>
+        </p:style>
+        <p:txBody>
+          <a:bodyPr rtlCol="0" anchor="ctr"/>
+          <a:lstStyle/>
+          <a:p>
+            <a:pPr algn="ctr"/>
+          </a:p>
+        </p:txBody>
+      </p:sp>
+      <p:sp>
+        <p:nvSpPr>
+          <p:cNvPr id="27" name="Rectangle 26"/>
+          <p:cNvSpPr/>
+          <p:nvPr/>
+        </p:nvSpPr>
+        <p:spPr>
+          <a:xfrm>
+            <a:off x="4283354" y="4055364"/>
+            <a:ext cx="3624986" cy="64008"/>
+          </a:xfrm>
+          <a:prstGeom prst="rect">
+            <a:avLst/>
+          </a:prstGeom>
+          <a:solidFill>
+            <a:srgbClr val="095292"/>
+          </a:solidFill>
+          <a:ln>
+            <a:noFill/>
+          </a:ln>
+        </p:spPr>
+        <p:style>
+          <a:lnRef idx="1">
+            <a:schemeClr val="accent1"/>
+          </a:lnRef>
+          <a:fillRef idx="3">
+            <a:schemeClr val="accent1"/>
+          </a:fillRef>
+          <a:effectRef idx="2">
+            <a:schemeClr val="accent1"/>
+          </a:effectRef>
+          <a:fontRef idx="minor">
+            <a:schemeClr val="lt1"/>
+          </a:fontRef>
+        </p:style>
+        <p:txBody>
+          <a:bodyPr rtlCol="0" anchor="ctr"/>
+          <a:lstStyle/>
+          <a:p>
+            <a:pPr algn="ctr"/>
+          </a:p>
+        </p:txBody>
+      </p:sp>
+      <p:sp>
+        <p:nvSpPr>
+          <p:cNvPr id="28" name="Rectangle 27"/>
+          <p:cNvSpPr/>
+          <p:nvPr/>
+        </p:nvSpPr>
+        <p:spPr>
+          <a:xfrm>
+            <a:off x="4283354" y="4119372"/>
+            <a:ext cx="3624986" cy="27432"/>
+          </a:xfrm>
+          <a:prstGeom prst="rect">
+            <a:avLst/>
+          </a:prstGeom>
+          <a:solidFill>
+            <a:srgbClr val="FFD000"/>
+          </a:solidFill>
+          <a:ln>
+            <a:noFill/>
+          </a:ln>
+        </p:spPr>
+        <p:style>
+          <a:lnRef idx="1">
+            <a:schemeClr val="accent1"/>
+          </a:lnRef>
+          <a:fillRef idx="3">
+            <a:schemeClr val="accent1"/>
+          </a:fillRef>
+          <a:effectRef idx="2">
+            <a:schemeClr val="accent1"/>
+          </a:effectRef>
+          <a:fontRef idx="minor">
+            <a:schemeClr val="lt1"/>
+          </a:fontRef>
+        </p:style>
+        <p:txBody>
+          <a:bodyPr rtlCol="0" anchor="ctr"/>
+          <a:lstStyle/>
+          <a:p>
+            <a:pPr algn="ctr"/>
+          </a:p>
+        </p:txBody>
+      </p:sp>
+      <p:pic>
+        <p:nvPicPr>
+          <p:cNvPr id="29" name="Picture 28" descr="examlab.png"/>
+          <p:cNvPicPr>
+            <a:picLocks noChangeAspect="1"/>
+          </p:cNvPicPr>
+          <p:nvPr/>
+        </p:nvPicPr>
+        <p:blipFill>
+          <a:blip r:embed="rId6"/>
+          <a:stretch>
+            <a:fillRect/>
+          </a:stretch>
+        </p:blipFill>
+        <p:spPr>
+          <a:xfrm>
+            <a:off x="5570067" y="4256532"/>
+            <a:ext cx="1051560" cy="1051560"/>
+          </a:xfrm>
+          <a:prstGeom prst="rect">
+            <a:avLst/>
+          </a:prstGeom>
+        </p:spPr>
+      </p:pic>
+      <p:sp>
+        <p:nvSpPr>
+          <p:cNvPr id="30" name="TextBox 29"/>
+          <p:cNvSpPr txBox="1"/>
+          <p:nvPr/>
+        </p:nvSpPr>
+        <p:spPr>
+          <a:xfrm>
+            <a:off x="4356506" y="5381244"/>
+            <a:ext cx="3478682" cy="502920"/>
+          </a:xfrm>
+          <a:prstGeom prst="rect">
+            <a:avLst/>
+          </a:prstGeom>
+          <a:noFill/>
+        </p:spPr>
+        <p:txBody>
+          <a:bodyPr wrap="square" anchor="t"/>
+          <a:lstStyle/>
+          <a:p>
+            <a:pPr algn="ctr"/>
+            <a:r>
+              <a:rPr sz="1300" b="1" i="0">
+                <a:solidFill>
+                  <a:srgbClr val="095292"/>
+                </a:solidFill>
+                <a:latin typeface="Calibri"/>
+              </a:rPr>
+              <a:t>ExamLab</a:t>
+            </a:r>
+          </a:p>
+          <a:p>
+            <a:pPr algn="ctr">
+              <a:spcBef>
+                <a:spcPts val="200"/>
+              </a:spcBef>
+            </a:pPr>
+            <a:r>
+              <a:rPr sz="1000" b="0" i="0">
+                <a:solidFill>
+                  <a:srgbClr val="666666"/>
+                </a:solidFill>
+                <a:latin typeface="Calibri"/>
+              </a:rPr>
+              <a:t>Talleres + quices/parciales</a:t>
+            </a:r>
+          </a:p>
+        </p:txBody>
+      </p:sp>
+      <p:sp>
+        <p:nvSpPr>
+          <p:cNvPr id="31" name="TextBox 30"/>
+          <p:cNvSpPr txBox="1"/>
+          <p:nvPr/>
+        </p:nvSpPr>
+        <p:spPr>
+          <a:xfrm>
+            <a:off x="11185855" y="6473952"/>
+            <a:ext cx="640080" cy="274320"/>
+          </a:xfrm>
+          <a:prstGeom prst="rect">
+            <a:avLst/>
+          </a:prstGeom>
+          <a:noFill/>
+        </p:spPr>
+        <p:txBody>
+          <a:bodyPr wrap="square">
+            <a:spAutoFit/>
+          </a:bodyPr>
+          <a:lstStyle/>
+          <a:p>
+            <a:pPr algn="r"/>
+            <a:r>
+              <a:rPr sz="1100" b="0" i="0">
+                <a:solidFill>
+                  <a:srgbClr val="666666"/>
+                </a:solidFill>
+                <a:latin typeface="Calibri"/>
+              </a:rPr>
+              <a:t>12</a:t>
+            </a:r>
+          </a:p>
+        </p:txBody>
+      </p:sp>
+    </p:spTree>
+  </p:cSld>
+  <p:clrMapOvr>
+    <a:masterClrMapping/>
+  </p:clrMapOvr>
+</p:sld>
+</file>
+
+<file path=ppt/slides/slide13.xml><?xml version="1.0" encoding="utf-8"?>
+<p:sld xmlns:a="http://schemas.openxmlformats.org/drawingml/2006/main" xmlns:p="http://schemas.openxmlformats.org/presentationml/2006/main" xmlns:r="http://schemas.openxmlformats.org/officeDocument/2006/relationships">
+  <p:cSld>
+    <p:bg>
+      <p:bgPr>
+        <a:solidFill>
+          <a:srgbClr val="FFFFFF"/>
+        </a:solidFill>
+        <a:effectLst/>
+      </p:bgPr>
+    </p:bg>
+    <p:spTree>
+      <p:nvGrpSpPr>
+        <p:cNvPr id="1" name=""/>
+        <p:cNvGrpSpPr/>
+        <p:nvPr/>
+      </p:nvGrpSpPr>
+      <p:grpSpPr/>
+      <p:sp>
+        <p:nvSpPr>
+          <p:cNvPr id="2" name="Rectangle 1"/>
+          <p:cNvSpPr/>
+          <p:nvPr/>
+        </p:nvSpPr>
+        <p:spPr>
+          <a:xfrm>
+            <a:off x="0" y="0"/>
             <a:ext cx="12191695" cy="164592"/>
           </a:xfrm>
           <a:prstGeom prst="rect">
@@ -6504,7 +7774,25 @@
                 </a:solidFill>
                 <a:latin typeface="Calibri"/>
               </a:rPr>
-              <a:t>–   Taller calificable: entrega máxima el </a:t>
+              <a:t>–   Talleres y quices/parciales se entregan/presentan en </a:t>
+            </a:r>
+            <a:r>
+              <a:rPr sz="1600" b="1" i="0">
+                <a:solidFill>
+                  <a:srgbClr val="333333"/>
+                </a:solidFill>
+                <a:latin typeface="Calibri"/>
+              </a:rPr>
+              <a:t>ExamLab</a:t>
+            </a:r>
+            <a:r>
+              <a:rPr sz="1600" b="0" i="0">
+                <a:solidFill>
+                  <a:srgbClr val="333333"/>
+                </a:solidFill>
+                <a:latin typeface="Calibri"/>
+              </a:rPr>
+              <a:t> (https://examlab.lovable.app/) — no es la plataforma oficial de la UNIAJC, la usamos solo para esto. Taller calificable: entrega máxima el </a:t>
             </a:r>
             <a:r>
               <a:rPr sz="1600" b="1" i="0">
@@ -8036,7 +9324,7 @@
                 </a:solidFill>
                 <a:latin typeface="Calibri"/>
               </a:rPr>
-              <a:t> Mapas y conjuntos (02/09)</a:t>
+              <a:t> Mapas, conjuntos e interfaces gráficas GUI (02/09)</a:t>
             </a:r>
           </a:p>
           <a:p>
@@ -8070,7 +9358,7 @@
                 </a:solidFill>
                 <a:latin typeface="Calibri"/>
               </a:rPr>
-              <a:t> Interfaces gráficas GUI · Parcial 1 (09/09)</a:t>
+              <a:t> Parcial 1 (09/09)</a:t>
             </a:r>
           </a:p>
           <a:p>
@@ -8433,7 +9721,7 @@
                 </a:solidFill>
                 <a:latin typeface="Calibri"/>
               </a:rPr>
-              <a:t> Parcial 3 · Cierre (18/11)</a:t>
+              <a:t> Parcial 3 (18/11)</a:t>
             </a:r>
           </a:p>
         </p:txBody>

--- a/Programacion II/Clases/Presentacion del Curso - Programacion II.pptx
+++ b/Programacion II/Clases/Presentacion del Curso - Programacion II.pptx
@@ -8216,7 +8216,7 @@
                 </a:solidFill>
                 <a:latin typeface="Calibri"/>
               </a:rPr>
-              <a:t>10/08 – 13/09/2026</a:t>
+              <a:t>24/08 – 27/09/2026</a:t>
             </a:r>
           </a:p>
         </p:txBody>
@@ -8273,7 +8273,7 @@
                 </a:solidFill>
                 <a:latin typeface="Calibri"/>
               </a:rPr>
-              <a:t> (Clase 5) · 10%</a:t>
+              <a:t> (23/09 · sesión 5) · 10%</a:t>
             </a:r>
           </a:p>
           <a:p>
@@ -8496,7 +8496,7 @@
                 </a:solidFill>
                 <a:latin typeface="Calibri"/>
               </a:rPr>
-              <a:t>14/09 – 18/10/2026</a:t>
+              <a:t>28/09 – 25/10/2026</a:t>
             </a:r>
           </a:p>
         </p:txBody>
@@ -8553,7 +8553,7 @@
                 </a:solidFill>
                 <a:latin typeface="Calibri"/>
               </a:rPr>
-              <a:t> (Clase 10) · 10%</a:t>
+              <a:t> (21/10 · sesión 9) · 10%</a:t>
             </a:r>
           </a:p>
           <a:p>
@@ -8776,7 +8776,7 @@
                 </a:solidFill>
                 <a:latin typeface="Calibri"/>
               </a:rPr>
-              <a:t>19/10 – 22/11/2026</a:t>
+              <a:t>26/10 – 22/11/2026</a:t>
             </a:r>
           </a:p>
         </p:txBody>
@@ -8833,7 +8833,7 @@
                 </a:solidFill>
                 <a:latin typeface="Calibri"/>
               </a:rPr>
-              <a:t> (Clase 15) · 15%</a:t>
+              <a:t> (18/11 · sesión 13) · 15%</a:t>
             </a:r>
           </a:p>
           <a:p>
@@ -9131,7 +9131,25 @@
                 </a:solidFill>
                 <a:latin typeface="Calibri"/>
               </a:rPr>
-              <a:t>Día 1: Sesión 0 (Presentación del curso) + Clase 1 (diagnóstico · tema)</a:t>
+              <a:t>13 sesiones · los 15 temas del microcurrículo se conservan: dos sesiones son </a:t>
+            </a:r>
+            <a:r>
+              <a:rPr sz="1300" b="1" i="0">
+                <a:solidFill>
+                  <a:srgbClr val="666666"/>
+                </a:solidFill>
+                <a:latin typeface="Calibri"/>
+              </a:rPr>
+              <a:t>dobles</a:t>
+            </a:r>
+            <a:r>
+              <a:rPr sz="1300" b="0" i="0">
+                <a:solidFill>
+                  <a:srgbClr val="666666"/>
+                </a:solidFill>
+                <a:latin typeface="Calibri"/>
+              </a:rPr>
+              <a:t> (dos temas en un bloque). Día 1: Sesión 0 + Clase 1 (diagnóstico · tema).</a:t>
             </a:r>
           </a:p>
         </p:txBody>
@@ -9188,7 +9206,7 @@
                 </a:solidFill>
                 <a:latin typeface="Calibri"/>
               </a:rPr>
-              <a:t> Presentación del curso (logística) + socialización del PI (12/08)</a:t>
+              <a:t> Presentación del curso (logística) + socialización del PI (26/08)</a:t>
             </a:r>
           </a:p>
           <a:p>
@@ -9213,7 +9231,7 @@
                 </a:solidFill>
                 <a:latin typeface="Calibri"/>
               </a:rPr>
-              <a:t>Clase 1 –</a:t>
+              <a:t>Sesión 1 –</a:t>
             </a:r>
             <a:r>
               <a:rPr sz="1600" b="0" i="0">
@@ -9222,7 +9240,7 @@
                 </a:solidFill>
                 <a:latin typeface="Calibri"/>
               </a:rPr>
-              <a:t> Diagnóstico · Introducción a POO (12/08)</a:t>
+              <a:t> Diagnóstico · Introducción a POO (26/08)</a:t>
             </a:r>
           </a:p>
           <a:p>
@@ -9247,7 +9265,7 @@
                 </a:solidFill>
                 <a:latin typeface="Calibri"/>
               </a:rPr>
-              <a:t>Clase 2 –</a:t>
+              <a:t>Sesión 2 –</a:t>
             </a:r>
             <a:r>
               <a:rPr sz="1600" b="0" i="0">
@@ -9256,7 +9274,7 @@
                 </a:solidFill>
                 <a:latin typeface="Calibri"/>
               </a:rPr>
-              <a:t> Colecciones dinámicas ArrayList (19/08)</a:t>
+              <a:t> Colecciones dinámicas ArrayList (02/09)</a:t>
             </a:r>
           </a:p>
           <a:p>
@@ -9281,7 +9299,7 @@
                 </a:solidFill>
                 <a:latin typeface="Calibri"/>
               </a:rPr>
-              <a:t>Clase 3 –</a:t>
+              <a:t>Sesión 3 –</a:t>
             </a:r>
             <a:r>
               <a:rPr sz="1600" b="0" i="0">
@@ -9290,7 +9308,7 @@
                 </a:solidFill>
                 <a:latin typeface="Calibri"/>
               </a:rPr>
-              <a:t> Pilas y colas (26/08)</a:t>
+              <a:t> Pilas y colas (09/09)</a:t>
             </a:r>
           </a:p>
           <a:p>
@@ -9315,7 +9333,7 @@
                 </a:solidFill>
                 <a:latin typeface="Calibri"/>
               </a:rPr>
-              <a:t>Clase 4 –</a:t>
+              <a:t>Sesión 4 –</a:t>
             </a:r>
             <a:r>
               <a:rPr sz="1600" b="0" i="0">
@@ -9324,7 +9342,7 @@
                 </a:solidFill>
                 <a:latin typeface="Calibri"/>
               </a:rPr>
-              <a:t> Mapas, conjuntos e interfaces gráficas GUI (02/09)</a:t>
+              <a:t> Mapas, conjuntos e interfaces gráficas GUI (16/09)</a:t>
             </a:r>
           </a:p>
           <a:p>
@@ -9349,7 +9367,7 @@
                 </a:solidFill>
                 <a:latin typeface="Calibri"/>
               </a:rPr>
-              <a:t>Clase 5 –</a:t>
+              <a:t>Sesión 5 –</a:t>
             </a:r>
             <a:r>
               <a:rPr sz="1600" b="0" i="0">
@@ -9358,7 +9376,7 @@
                 </a:solidFill>
                 <a:latin typeface="Calibri"/>
               </a:rPr>
-              <a:t> Parcial 1 (09/09)</a:t>
+              <a:t> Parcial 1 (23/09) · presencial · solo evaluación</a:t>
             </a:r>
           </a:p>
           <a:p>
@@ -9383,7 +9401,7 @@
                 </a:solidFill>
                 <a:latin typeface="Calibri"/>
               </a:rPr>
-              <a:t>Clase 6 –</a:t>
+              <a:t>Sesión 6 –</a:t>
             </a:r>
             <a:r>
               <a:rPr sz="1600" b="0" i="0">
@@ -9392,9 +9410,32 @@
                 </a:solidFill>
                 <a:latin typeface="Calibri"/>
               </a:rPr>
-              <a:t> Eventos y controladores (16/09)</a:t>
-            </a:r>
-          </a:p>
+              <a:t> Eventos y controladores (30/09)</a:t>
+            </a:r>
+          </a:p>
+        </p:txBody>
+      </p:sp>
+      <p:sp>
+        <p:nvSpPr>
+          <p:cNvPr id="7" name="TextBox 6"/>
+          <p:cNvSpPr txBox="1"/>
+          <p:nvPr/>
+        </p:nvSpPr>
+        <p:spPr>
+          <a:xfrm>
+            <a:off x="6187287" y="1453895"/>
+            <a:ext cx="5364327" cy="4946904"/>
+          </a:xfrm>
+          <a:prstGeom prst="rect">
+            <a:avLst/>
+          </a:prstGeom>
+          <a:noFill/>
+        </p:spPr>
+        <p:txBody>
+          <a:bodyPr wrap="square">
+            <a:spAutoFit/>
+          </a:bodyPr>
+          <a:lstStyle/>
           <a:p>
             <a:pPr>
               <a:spcAft>
@@ -9417,7 +9458,7 @@
                 </a:solidFill>
                 <a:latin typeface="Calibri"/>
               </a:rPr>
-              <a:t>Clase 7 –</a:t>
+              <a:t>Sesión 7 –</a:t>
             </a:r>
             <a:r>
               <a:rPr sz="1600" b="0" i="0">
@@ -9426,32 +9467,9 @@
                 </a:solidFill>
                 <a:latin typeface="Calibri"/>
               </a:rPr>
-              <a:t> Patrones de diseño (23/09)</a:t>
-            </a:r>
-          </a:p>
-        </p:txBody>
-      </p:sp>
-      <p:sp>
-        <p:nvSpPr>
-          <p:cNvPr id="7" name="TextBox 6"/>
-          <p:cNvSpPr txBox="1"/>
-          <p:nvPr/>
-        </p:nvSpPr>
-        <p:spPr>
-          <a:xfrm>
-            <a:off x="6187287" y="1453895"/>
-            <a:ext cx="5364327" cy="4946904"/>
-          </a:xfrm>
-          <a:prstGeom prst="rect">
-            <a:avLst/>
-          </a:prstGeom>
-          <a:noFill/>
-        </p:spPr>
-        <p:txBody>
-          <a:bodyPr wrap="square">
-            <a:spAutoFit/>
-          </a:bodyPr>
-          <a:lstStyle/>
+              <a:t> Patrones de diseño (Singleton y Factory) (07/10)</a:t>
+            </a:r>
+          </a:p>
           <a:p>
             <a:pPr>
               <a:spcAft>
@@ -9474,7 +9492,7 @@
                 </a:solidFill>
                 <a:latin typeface="Calibri"/>
               </a:rPr>
-              <a:t>Clase 8 –</a:t>
+              <a:t>Sesión 8 –</a:t>
             </a:r>
             <a:r>
               <a:rPr sz="1600" b="0" i="0">
@@ -9483,7 +9501,7 @@
                 </a:solidFill>
                 <a:latin typeface="Calibri"/>
               </a:rPr>
-              <a:t> Documentación y QA (30/09)</a:t>
+              <a:t> Documentación y QA (Javadoc y pruebas) + Refactorización con IA y persistencia (14/10) · sesión doble · Clases 8+9</a:t>
             </a:r>
           </a:p>
           <a:p>
@@ -9508,7 +9526,7 @@
                 </a:solidFill>
                 <a:latin typeface="Calibri"/>
               </a:rPr>
-              <a:t>Clase 9 –</a:t>
+              <a:t>Sesión 9 –</a:t>
             </a:r>
             <a:r>
               <a:rPr sz="1600" b="0" i="0">
@@ -9517,7 +9535,7 @@
                 </a:solidFill>
                 <a:latin typeface="Calibri"/>
               </a:rPr>
-              <a:t> Refactorización con IA y persistencia (07/10)</a:t>
+              <a:t> Parcial 2 (21/10) · presencial · solo evaluación</a:t>
             </a:r>
           </a:p>
           <a:p>
@@ -9542,7 +9560,7 @@
                 </a:solidFill>
                 <a:latin typeface="Calibri"/>
               </a:rPr>
-              <a:t>Clase 10 –</a:t>
+              <a:t>Sesión 10 –</a:t>
             </a:r>
             <a:r>
               <a:rPr sz="1600" b="0" i="0">
@@ -9551,7 +9569,7 @@
                 </a:solidFill>
                 <a:latin typeface="Calibri"/>
               </a:rPr>
-              <a:t> Parcial 2 (14/10)</a:t>
+              <a:t> Revisión de código cruzada + Integración de módulos (28/10) · sesión doble · Clases 11+12</a:t>
             </a:r>
           </a:p>
           <a:p>
@@ -9576,7 +9594,7 @@
                 </a:solidFill>
                 <a:latin typeface="Calibri"/>
               </a:rPr>
-              <a:t>Clase 11 –</a:t>
+              <a:t>Sesión 11 –</a:t>
             </a:r>
             <a:r>
               <a:rPr sz="1600" b="0" i="0">
@@ -9585,7 +9603,7 @@
                 </a:solidFill>
                 <a:latin typeface="Calibri"/>
               </a:rPr>
-              <a:t> Revisión de código cruzada (21/10)</a:t>
+              <a:t> Control de excepciones (04/11) · material Clase 13</a:t>
             </a:r>
           </a:p>
           <a:p>
@@ -9610,7 +9628,7 @@
                 </a:solidFill>
                 <a:latin typeface="Calibri"/>
               </a:rPr>
-              <a:t>Clase 12 –</a:t>
+              <a:t>Sesión 12 –</a:t>
             </a:r>
             <a:r>
               <a:rPr sz="1600" b="0" i="0">
@@ -9619,7 +9637,7 @@
                 </a:solidFill>
                 <a:latin typeface="Calibri"/>
               </a:rPr>
-              <a:t> Integración de módulos (28/10)</a:t>
+              <a:t> Preparación presentación final (11/11) · material Clase 14</a:t>
             </a:r>
           </a:p>
           <a:p>
@@ -9644,7 +9662,7 @@
                 </a:solidFill>
                 <a:latin typeface="Calibri"/>
               </a:rPr>
-              <a:t>Clase 13 –</a:t>
+              <a:t>Sesión 13 –</a:t>
             </a:r>
             <a:r>
               <a:rPr sz="1600" b="0" i="0">
@@ -9653,75 +9671,7 @@
                 </a:solidFill>
                 <a:latin typeface="Calibri"/>
               </a:rPr>
-              <a:t> Control de excepciones (04/11)</a:t>
-            </a:r>
-          </a:p>
-          <a:p>
-            <a:pPr>
-              <a:spcAft>
-                <a:spcPts val="900"/>
-              </a:spcAft>
-            </a:pPr>
-            <a:r>
-              <a:rPr sz="1600" b="0" i="0">
-                <a:solidFill>
-                  <a:srgbClr val="333333"/>
-                </a:solidFill>
-                <a:latin typeface="Calibri"/>
-              </a:rPr>
-              <a:t>–   </a:t>
-            </a:r>
-            <a:r>
-              <a:rPr sz="1600" b="1" i="0">
-                <a:solidFill>
-                  <a:srgbClr val="333333"/>
-                </a:solidFill>
-                <a:latin typeface="Calibri"/>
-              </a:rPr>
-              <a:t>Clase 14 –</a:t>
-            </a:r>
-            <a:r>
-              <a:rPr sz="1600" b="0" i="0">
-                <a:solidFill>
-                  <a:srgbClr val="333333"/>
-                </a:solidFill>
-                <a:latin typeface="Calibri"/>
-              </a:rPr>
-              <a:t> Preparación presentación final (11/11)</a:t>
-            </a:r>
-          </a:p>
-          <a:p>
-            <a:pPr>
-              <a:spcAft>
-                <a:spcPts val="900"/>
-              </a:spcAft>
-            </a:pPr>
-            <a:r>
-              <a:rPr sz="1600" b="0" i="0">
-                <a:solidFill>
-                  <a:srgbClr val="333333"/>
-                </a:solidFill>
-                <a:latin typeface="Calibri"/>
-              </a:rPr>
-              <a:t>–   </a:t>
-            </a:r>
-            <a:r>
-              <a:rPr sz="1600" b="1" i="0">
-                <a:solidFill>
-                  <a:srgbClr val="333333"/>
-                </a:solidFill>
-                <a:latin typeface="Calibri"/>
-              </a:rPr>
-              <a:t>Clase 15 –</a:t>
-            </a:r>
-            <a:r>
-              <a:rPr sz="1600" b="0" i="0">
-                <a:solidFill>
-                  <a:srgbClr val="333333"/>
-                </a:solidFill>
-                <a:latin typeface="Calibri"/>
-              </a:rPr>
-              <a:t> Parcial 3 (18/11)</a:t>
+              <a:t> Parcial 3 (18/11) · presencial · solo evaluación</a:t>
             </a:r>
           </a:p>
         </p:txBody>

--- a/Programacion II/Clases/Presentacion del Curso - Programacion II.pptx
+++ b/Programacion II/Clases/Presentacion del Curso - Programacion II.pptx
@@ -7695,7 +7695,7 @@
                 </a:solidFill>
                 <a:latin typeface="Calibri"/>
               </a:rPr>
-              <a:t>Presencialidad asistida</a:t>
+              <a:t>Virtual</a:t>
             </a:r>
             <a:r>
               <a:rPr sz="1600" b="0" i="0">
@@ -7704,7 +7704,7 @@
                 </a:solidFill>
                 <a:latin typeface="Calibri"/>
               </a:rPr>
-              <a:t>: Clase 1 y parciales </a:t>
+              <a:t>: todas las sesiones son </a:t>
             </a:r>
             <a:r>
               <a:rPr sz="1600" b="1" i="0">
@@ -7713,7 +7713,7 @@
                 </a:solidFill>
                 <a:latin typeface="Calibri"/>
               </a:rPr>
-              <a:t>presencial</a:t>
+              <a:t>virtual síncrona</a:t>
             </a:r>
             <a:r>
               <a:rPr sz="1600" b="0" i="0">
@@ -7722,25 +7722,7 @@
                 </a:solidFill>
                 <a:latin typeface="Calibri"/>
               </a:rPr>
-              <a:t>; resto </a:t>
-            </a:r>
-            <a:r>
-              <a:rPr sz="1600" b="1" i="0">
-                <a:solidFill>
-                  <a:srgbClr val="333333"/>
-                </a:solidFill>
-                <a:latin typeface="Calibri"/>
-              </a:rPr>
-              <a:t>virtual síncrona</a:t>
-            </a:r>
-            <a:r>
-              <a:rPr sz="1600" b="0" i="0">
-                <a:solidFill>
-                  <a:srgbClr val="333333"/>
-                </a:solidFill>
-                <a:latin typeface="Calibri"/>
-              </a:rPr>
-              <a:t>; festivos = </a:t>
+              <a:t> por Google Meet, incluidos la Sesión 1 y los parciales; festivos = </a:t>
             </a:r>
             <a:r>
               <a:rPr sz="1600" b="1" i="0">

--- a/Programacion II/Clases/Presentacion del Curso - Programacion II.pptx
+++ b/Programacion II/Clases/Presentacion del Curso - Programacion II.pptx
@@ -3631,7 +3631,7 @@
                 </a:solidFill>
                 <a:latin typeface="Calibri"/>
               </a:rPr>
-              <a:t> (https://examlab.lovable.app/): entrega de talleres + quices/parciales del curso.</a:t>
+              <a:t> (https://uniaj.examlab.workers.dev/): entrega de talleres + quices/parciales del curso.</a:t>
             </a:r>
           </a:p>
           <a:p>
@@ -4120,7 +4120,7 @@
                 </a:solidFill>
                 <a:latin typeface="Calibri"/>
               </a:rPr>
-              <a:t>Los talleres guiados se entregan en ExamLab (https://examlab.lovable.app/) a más tardar el domingo 23:59 de la semana correspondiente.</a:t>
+              <a:t>Los talleres guiados se entregan en ExamLab (https://uniaj.examlab.workers.dev/) a más tardar el domingo 23:59 de la semana correspondiente.</a:t>
             </a:r>
           </a:p>
         </p:txBody>
@@ -7774,7 +7774,7 @@
                 </a:solidFill>
                 <a:latin typeface="Calibri"/>
               </a:rPr>
-              <a:t> (https://examlab.lovable.app/) — no es la plataforma oficial de la UNIAJC, la usamos solo para esto. Taller calificable: entrega máxima el </a:t>
+              <a:t> (https://uniaj.examlab.workers.dev/) — no es la plataforma oficial de la UNIAJC, la usamos solo para esto. Taller calificable: entrega máxima el </a:t>
             </a:r>
             <a:r>
               <a:rPr sz="1600" b="1" i="0">

--- a/Programacion II/Clases/Presentacion del Curso - Programacion II.pptx
+++ b/Programacion II/Clases/Presentacion del Curso - Programacion II.pptx
@@ -3663,7 +3663,7 @@
                 </a:solidFill>
                 <a:latin typeface="Calibri"/>
               </a:rPr>
-              <a:t>–   Material de clase: carpeta `Clases/Clase N` + talleres; guiones en `Guiones/` / `Kit docente/`.</a:t>
+              <a:t>–   Material de clase: carpeta «Clases/Clase N» + talleres; guiones en «Guiones/» / «Kit docente/».</a:t>
             </a:r>
           </a:p>
         </p:txBody>
@@ -4625,8 +4625,8 @@
         </p:blipFill>
         <p:spPr>
           <a:xfrm>
-            <a:off x="1743913" y="1792224"/>
-            <a:ext cx="1051560" cy="1051560"/>
+            <a:off x="1659331" y="1847087"/>
+            <a:ext cx="1220724" cy="1220724"/>
           </a:xfrm>
           <a:prstGeom prst="rect">
             <a:avLst/>
@@ -4641,8 +4641,8 @@
         </p:nvSpPr>
         <p:spPr>
           <a:xfrm>
-            <a:off x="530352" y="2916936"/>
-            <a:ext cx="3478682" cy="502920"/>
+            <a:off x="530352" y="3159251"/>
+            <a:ext cx="3478682" cy="621792"/>
           </a:xfrm>
           <a:prstGeom prst="rect">
             <a:avLst/>
@@ -4829,8 +4829,8 @@
         </p:blipFill>
         <p:spPr>
           <a:xfrm>
-            <a:off x="5570067" y="1792224"/>
-            <a:ext cx="1051560" cy="1051560"/>
+            <a:off x="5485485" y="1847087"/>
+            <a:ext cx="1220724" cy="1220724"/>
           </a:xfrm>
           <a:prstGeom prst="rect">
             <a:avLst/>
@@ -4845,8 +4845,8 @@
         </p:nvSpPr>
         <p:spPr>
           <a:xfrm>
-            <a:off x="4356506" y="2916936"/>
-            <a:ext cx="3478682" cy="502920"/>
+            <a:off x="4356506" y="3159251"/>
+            <a:ext cx="3478682" cy="621792"/>
           </a:xfrm>
           <a:prstGeom prst="rect">
             <a:avLst/>
@@ -5033,8 +5033,8 @@
         </p:blipFill>
         <p:spPr>
           <a:xfrm>
-            <a:off x="9396222" y="1792224"/>
-            <a:ext cx="1051560" cy="1051560"/>
+            <a:off x="9311640" y="1847087"/>
+            <a:ext cx="1220724" cy="1220724"/>
           </a:xfrm>
           <a:prstGeom prst="rect">
             <a:avLst/>
@@ -5049,8 +5049,8 @@
         </p:nvSpPr>
         <p:spPr>
           <a:xfrm>
-            <a:off x="8182660" y="2916936"/>
-            <a:ext cx="3478682" cy="502920"/>
+            <a:off x="8182660" y="3159251"/>
+            <a:ext cx="3478682" cy="621792"/>
           </a:xfrm>
           <a:prstGeom prst="rect">
             <a:avLst/>
@@ -5098,7 +5098,7 @@
         </p:nvSpPr>
         <p:spPr>
           <a:xfrm>
-            <a:off x="457200" y="4055364"/>
+            <a:off x="2370277" y="4055364"/>
             <a:ext cx="3624986" cy="2299716"/>
           </a:xfrm>
           <a:prstGeom prst="roundRect">
@@ -5143,7 +5143,7 @@
         </p:nvSpPr>
         <p:spPr>
           <a:xfrm>
-            <a:off x="457200" y="4055364"/>
+            <a:off x="2370277" y="4055364"/>
             <a:ext cx="3624986" cy="64008"/>
           </a:xfrm>
           <a:prstGeom prst="rect">
@@ -5186,7 +5186,7 @@
         </p:nvSpPr>
         <p:spPr>
           <a:xfrm>
-            <a:off x="457200" y="4119372"/>
+            <a:off x="2370277" y="4119372"/>
             <a:ext cx="3624986" cy="27432"/>
           </a:xfrm>
           <a:prstGeom prst="rect">
@@ -5237,8 +5237,8 @@
         </p:blipFill>
         <p:spPr>
           <a:xfrm>
-            <a:off x="1743913" y="4256532"/>
-            <a:ext cx="1051560" cy="1051560"/>
+            <a:off x="3572408" y="4311396"/>
+            <a:ext cx="1220724" cy="1220724"/>
           </a:xfrm>
           <a:prstGeom prst="rect">
             <a:avLst/>
@@ -5253,8 +5253,8 @@
         </p:nvSpPr>
         <p:spPr>
           <a:xfrm>
-            <a:off x="530352" y="5381244"/>
-            <a:ext cx="3478682" cy="502920"/>
+            <a:off x="2443429" y="5623560"/>
+            <a:ext cx="3478682" cy="621792"/>
           </a:xfrm>
           <a:prstGeom prst="rect">
             <a:avLst/>
@@ -5302,7 +5302,7 @@
         </p:nvSpPr>
         <p:spPr>
           <a:xfrm>
-            <a:off x="4283354" y="4055364"/>
+            <a:off x="6196431" y="4055364"/>
             <a:ext cx="3624986" cy="2299716"/>
           </a:xfrm>
           <a:prstGeom prst="roundRect">
@@ -5347,7 +5347,7 @@
         </p:nvSpPr>
         <p:spPr>
           <a:xfrm>
-            <a:off x="4283354" y="4055364"/>
+            <a:off x="6196431" y="4055364"/>
             <a:ext cx="3624986" cy="64008"/>
           </a:xfrm>
           <a:prstGeom prst="rect">
@@ -5390,7 +5390,7 @@
         </p:nvSpPr>
         <p:spPr>
           <a:xfrm>
-            <a:off x="4283354" y="4119372"/>
+            <a:off x="6196431" y="4119372"/>
             <a:ext cx="3624986" cy="27432"/>
           </a:xfrm>
           <a:prstGeom prst="rect">
@@ -5441,8 +5441,8 @@
         </p:blipFill>
         <p:spPr>
           <a:xfrm>
-            <a:off x="5570067" y="4256532"/>
-            <a:ext cx="1051560" cy="1051560"/>
+            <a:off x="7398562" y="4311396"/>
+            <a:ext cx="1220724" cy="1220724"/>
           </a:xfrm>
           <a:prstGeom prst="rect">
             <a:avLst/>
@@ -5457,8 +5457,8 @@
         </p:nvSpPr>
         <p:spPr>
           <a:xfrm>
-            <a:off x="4356506" y="5381244"/>
-            <a:ext cx="3478682" cy="502920"/>
+            <a:off x="6269583" y="5623560"/>
+            <a:ext cx="3478682" cy="621792"/>
           </a:xfrm>
           <a:prstGeom prst="rect">
             <a:avLst/>
@@ -9358,7 +9358,7 @@
                 </a:solidFill>
                 <a:latin typeface="Calibri"/>
               </a:rPr>
-              <a:t> Parcial 1 (23/09) · presencial · solo evaluación</a:t>
+              <a:t> Parcial 1 (23/09) · virtual síncrona · solo evaluación</a:t>
             </a:r>
           </a:p>
           <a:p>
@@ -9517,7 +9517,7 @@
                 </a:solidFill>
                 <a:latin typeface="Calibri"/>
               </a:rPr>
-              <a:t> Parcial 2 (21/10) · presencial · solo evaluación</a:t>
+              <a:t> Parcial 2 (21/10) · virtual síncrona · solo evaluación</a:t>
             </a:r>
           </a:p>
           <a:p>
@@ -9653,7 +9653,7 @@
                 </a:solidFill>
                 <a:latin typeface="Calibri"/>
               </a:rPr>
-              <a:t> Parcial 3 (18/11) · presencial · solo evaluación</a:t>
+              <a:t> Parcial 3 (18/11) · virtual síncrona · solo evaluación</a:t>
             </a:r>
           </a:p>
         </p:txBody>

--- a/Programacion II/Clases/Presentacion del Curso - Programacion II.pptx
+++ b/Programacion II/Clases/Presentacion del Curso - Programacion II.pptx
@@ -3591,7 +3591,7 @@
               </a:spcAft>
             </a:pPr>
             <a:r>
-              <a:rPr sz="1600" b="0" i="0">
+              <a:rPr sz="2000" b="0" i="0">
                 <a:solidFill>
                   <a:srgbClr val="333333"/>
                 </a:solidFill>
@@ -3607,7 +3607,7 @@
               </a:spcAft>
             </a:pPr>
             <a:r>
-              <a:rPr sz="1600" b="0" i="0">
+              <a:rPr sz="2000" b="0" i="0">
                 <a:solidFill>
                   <a:srgbClr val="333333"/>
                 </a:solidFill>
@@ -3616,7 +3616,7 @@
               <a:t>–   </a:t>
             </a:r>
             <a:r>
-              <a:rPr sz="1600" b="1" i="0">
+              <a:rPr sz="2000" b="1" i="0">
                 <a:solidFill>
                   <a:srgbClr val="333333"/>
                 </a:solidFill>
@@ -3625,7 +3625,7 @@
               <a:t>ExamLab</a:t>
             </a:r>
             <a:r>
-              <a:rPr sz="1600" b="0" i="0">
+              <a:rPr sz="2000" b="0" i="0">
                 <a:solidFill>
                   <a:srgbClr val="333333"/>
                 </a:solidFill>
@@ -3641,7 +3641,7 @@
               </a:spcAft>
             </a:pPr>
             <a:r>
-              <a:rPr sz="1600" b="0" i="0">
+              <a:rPr sz="2000" b="0" i="0">
                 <a:solidFill>
                   <a:srgbClr val="333333"/>
                 </a:solidFill>
@@ -3657,7 +3657,7 @@
               </a:spcAft>
             </a:pPr>
             <a:r>
-              <a:rPr sz="1600" b="0" i="0">
+              <a:rPr sz="2000" b="0" i="0">
                 <a:solidFill>
                   <a:srgbClr val="333333"/>
                 </a:solidFill>
@@ -6878,7 +6878,7 @@
               </a:spcAft>
             </a:pPr>
             <a:r>
-              <a:rPr sz="1600" b="0" i="0">
+              <a:rPr sz="2000" b="0" i="0">
                 <a:solidFill>
                   <a:srgbClr val="333333"/>
                 </a:solidFill>
@@ -6887,7 +6887,7 @@
               <a:t>–   Profundizar el paradigma </a:t>
             </a:r>
             <a:r>
-              <a:rPr sz="1600" b="1" i="0">
+              <a:rPr sz="2000" b="1" i="0">
                 <a:solidFill>
                   <a:srgbClr val="333333"/>
                 </a:solidFill>
@@ -6896,7 +6896,7 @@
               <a:t>POO</a:t>
             </a:r>
             <a:r>
-              <a:rPr sz="1600" b="0" i="0">
+              <a:rPr sz="2000" b="0" i="0">
                 <a:solidFill>
                   <a:srgbClr val="333333"/>
                 </a:solidFill>
@@ -6912,7 +6912,7 @@
               </a:spcAft>
             </a:pPr>
             <a:r>
-              <a:rPr sz="1600" b="0" i="0">
+              <a:rPr sz="2000" b="0" i="0">
                 <a:solidFill>
                   <a:srgbClr val="333333"/>
                 </a:solidFill>
@@ -6921,7 +6921,7 @@
               <a:t>–   Metodología activa basada en </a:t>
             </a:r>
             <a:r>
-              <a:rPr sz="1600" b="1" i="0">
+              <a:rPr sz="2000" b="1" i="0">
                 <a:solidFill>
                   <a:srgbClr val="333333"/>
                 </a:solidFill>
@@ -6930,7 +6930,7 @@
               <a:t>proyectos</a:t>
             </a:r>
             <a:r>
-              <a:rPr sz="1600" b="0" i="0">
+              <a:rPr sz="2000" b="0" i="0">
                 <a:solidFill>
                   <a:srgbClr val="333333"/>
                 </a:solidFill>
@@ -6946,7 +6946,7 @@
               </a:spcAft>
             </a:pPr>
             <a:r>
-              <a:rPr sz="1600" b="0" i="0">
+              <a:rPr sz="2000" b="0" i="0">
                 <a:solidFill>
                   <a:srgbClr val="333333"/>
                 </a:solidFill>
@@ -6962,7 +6962,7 @@
               </a:spcAft>
             </a:pPr>
             <a:r>
-              <a:rPr sz="1600" b="0" i="0">
+              <a:rPr sz="2000" b="0" i="0">
                 <a:solidFill>
                   <a:srgbClr val="333333"/>
                 </a:solidFill>
@@ -6971,7 +6971,7 @@
               <a:t>–   </a:t>
             </a:r>
             <a:r>
-              <a:rPr sz="1600" b="1" i="0">
+              <a:rPr sz="2000" b="1" i="0">
                 <a:solidFill>
                   <a:srgbClr val="333333"/>
                 </a:solidFill>
@@ -6980,7 +6980,7 @@
               <a:t>Objeto de estudio:</a:t>
             </a:r>
             <a:r>
-              <a:rPr sz="1600" b="0" i="0">
+              <a:rPr sz="2000" b="0" i="0">
                 <a:solidFill>
                   <a:srgbClr val="333333"/>
                 </a:solidFill>
@@ -7200,7 +7200,7 @@
               </a:spcAft>
             </a:pPr>
             <a:r>
-              <a:rPr sz="1600" b="0" i="0">
+              <a:rPr sz="2000" b="0" i="0">
                 <a:solidFill>
                   <a:srgbClr val="333333"/>
                 </a:solidFill>
@@ -7209,7 +7209,7 @@
               <a:t>–   </a:t>
             </a:r>
             <a:r>
-              <a:rPr sz="1600" b="1" i="0">
+              <a:rPr sz="2000" b="1" i="0">
                 <a:solidFill>
                   <a:srgbClr val="333333"/>
                 </a:solidFill>
@@ -7218,7 +7218,7 @@
               <a:t>Objetivo:</a:t>
             </a:r>
             <a:r>
-              <a:rPr sz="1600" b="0" i="0">
+              <a:rPr sz="2000" b="0" i="0">
                 <a:solidFill>
                   <a:srgbClr val="333333"/>
                 </a:solidFill>
@@ -7234,7 +7234,7 @@
               </a:spcAft>
             </a:pPr>
             <a:r>
-              <a:rPr sz="1600" b="0" i="0">
+              <a:rPr sz="2000" b="0" i="0">
                 <a:solidFill>
                   <a:srgbClr val="333333"/>
                 </a:solidFill>
@@ -7243,7 +7243,7 @@
               <a:t>–   </a:t>
             </a:r>
             <a:r>
-              <a:rPr sz="1600" b="1" i="0">
+              <a:rPr sz="2000" b="1" i="0">
                 <a:solidFill>
                   <a:srgbClr val="333333"/>
                 </a:solidFill>
@@ -7252,7 +7252,7 @@
               <a:t>RAA1</a:t>
             </a:r>
             <a:r>
-              <a:rPr sz="1600" b="0" i="0">
+              <a:rPr sz="2000" b="0" i="0">
                 <a:solidFill>
                   <a:srgbClr val="333333"/>
                 </a:solidFill>
@@ -7268,7 +7268,7 @@
               </a:spcAft>
             </a:pPr>
             <a:r>
-              <a:rPr sz="1600" b="0" i="0">
+              <a:rPr sz="2000" b="0" i="0">
                 <a:solidFill>
                   <a:srgbClr val="333333"/>
                 </a:solidFill>
@@ -7277,7 +7277,7 @@
               <a:t>–   </a:t>
             </a:r>
             <a:r>
-              <a:rPr sz="1600" b="1" i="0">
+              <a:rPr sz="2000" b="1" i="0">
                 <a:solidFill>
                   <a:srgbClr val="333333"/>
                 </a:solidFill>
@@ -7286,7 +7286,7 @@
               <a:t>RAA2</a:t>
             </a:r>
             <a:r>
-              <a:rPr sz="1600" b="0" i="0">
+              <a:rPr sz="2000" b="0" i="0">
                 <a:solidFill>
                   <a:srgbClr val="333333"/>
                 </a:solidFill>
@@ -7302,7 +7302,7 @@
               </a:spcAft>
             </a:pPr>
             <a:r>
-              <a:rPr sz="1600" b="0" i="0">
+              <a:rPr sz="2000" b="0" i="0">
                 <a:solidFill>
                   <a:srgbClr val="333333"/>
                 </a:solidFill>
@@ -7311,7 +7311,7 @@
               <a:t>–   </a:t>
             </a:r>
             <a:r>
-              <a:rPr sz="1600" b="1" i="0">
+              <a:rPr sz="2000" b="1" i="0">
                 <a:solidFill>
                   <a:srgbClr val="333333"/>
                 </a:solidFill>
@@ -7320,7 +7320,7 @@
               <a:t>RAA3</a:t>
             </a:r>
             <a:r>
-              <a:rPr sz="1600" b="0" i="0">
+              <a:rPr sz="2000" b="0" i="0">
                 <a:solidFill>
                   <a:srgbClr val="333333"/>
                 </a:solidFill>
@@ -7540,7 +7540,7 @@
               </a:spcAft>
             </a:pPr>
             <a:r>
-              <a:rPr sz="1600" b="0" i="0">
+              <a:rPr sz="2000" b="0" i="0">
                 <a:solidFill>
                   <a:srgbClr val="333333"/>
                 </a:solidFill>
@@ -7549,7 +7549,7 @@
               <a:t>–   </a:t>
             </a:r>
             <a:r>
-              <a:rPr sz="1600" b="1" i="0">
+              <a:rPr sz="2000" b="1" i="0">
                 <a:solidFill>
                   <a:srgbClr val="333333"/>
                 </a:solidFill>
@@ -7558,7 +7558,7 @@
               <a:t>Sesión 0 (hoy)</a:t>
             </a:r>
             <a:r>
-              <a:rPr sz="1600" b="0" i="0">
+              <a:rPr sz="2000" b="0" i="0">
                 <a:solidFill>
                   <a:srgbClr val="333333"/>
                 </a:solidFill>
@@ -7567,7 +7567,7 @@
               <a:t> = logística + acuerdo pedagógico + evaluación + CONTENIDO + </a:t>
             </a:r>
             <a:r>
-              <a:rPr sz="1600" b="1" i="0">
+              <a:rPr sz="2000" b="1" i="0">
                 <a:solidFill>
                   <a:srgbClr val="333333"/>
                 </a:solidFill>
@@ -7576,7 +7576,7 @@
               <a:t>socialización del Proyecto Integrador</a:t>
             </a:r>
             <a:r>
-              <a:rPr sz="1600" b="0" i="0">
+              <a:rPr sz="2000" b="0" i="0">
                 <a:solidFill>
                   <a:srgbClr val="333333"/>
                 </a:solidFill>
@@ -7592,7 +7592,7 @@
               </a:spcAft>
             </a:pPr>
             <a:r>
-              <a:rPr sz="1600" b="0" i="0">
+              <a:rPr sz="2000" b="0" i="0">
                 <a:solidFill>
                   <a:srgbClr val="333333"/>
                 </a:solidFill>
@@ -7601,7 +7601,7 @@
               <a:t>–   </a:t>
             </a:r>
             <a:r>
-              <a:rPr sz="1600" b="1" i="0">
+              <a:rPr sz="2000" b="1" i="0">
                 <a:solidFill>
                   <a:srgbClr val="333333"/>
                 </a:solidFill>
@@ -7610,7 +7610,7 @@
               <a:t>Clase 1</a:t>
             </a:r>
             <a:r>
-              <a:rPr sz="1600" b="0" i="0">
+              <a:rPr sz="2000" b="0" i="0">
                 <a:solidFill>
                   <a:srgbClr val="333333"/>
                 </a:solidFill>
@@ -7626,7 +7626,7 @@
               </a:spcAft>
             </a:pPr>
             <a:r>
-              <a:rPr sz="1600" b="0" i="0">
+              <a:rPr sz="2000" b="0" i="0">
                 <a:solidFill>
                   <a:srgbClr val="333333"/>
                 </a:solidFill>
@@ -7635,7 +7635,7 @@
               <a:t>–   Cada miércoles (120 min): </a:t>
             </a:r>
             <a:r>
-              <a:rPr sz="1600" b="1" i="0">
+              <a:rPr sz="2000" b="1" i="0">
                 <a:solidFill>
                   <a:srgbClr val="333333"/>
                 </a:solidFill>
@@ -7644,7 +7644,7 @@
               <a:t>Teoría Core</a:t>
             </a:r>
             <a:r>
-              <a:rPr sz="1600" b="0" i="0">
+              <a:rPr sz="2000" b="0" i="0">
                 <a:solidFill>
                   <a:srgbClr val="333333"/>
                 </a:solidFill>
@@ -7653,7 +7653,7 @@
               <a:t> → </a:t>
             </a:r>
             <a:r>
-              <a:rPr sz="1600" b="1" i="0">
+              <a:rPr sz="2000" b="1" i="0">
                 <a:solidFill>
                   <a:srgbClr val="333333"/>
                 </a:solidFill>
@@ -7662,7 +7662,7 @@
               <a:t>Taller Guiado</a:t>
             </a:r>
             <a:r>
-              <a:rPr sz="1600" b="0" i="0">
+              <a:rPr sz="2000" b="0" i="0">
                 <a:solidFill>
                   <a:srgbClr val="333333"/>
                 </a:solidFill>
@@ -7671,7 +7671,7 @@
               <a:t> → </a:t>
             </a:r>
             <a:r>
-              <a:rPr sz="1600" b="1" i="0">
+              <a:rPr sz="2000" b="1" i="0">
                 <a:solidFill>
                   <a:srgbClr val="333333"/>
                 </a:solidFill>
@@ -7680,7 +7680,7 @@
               <a:t>cierre</a:t>
             </a:r>
             <a:r>
-              <a:rPr sz="1600" b="0" i="0">
+              <a:rPr sz="2000" b="0" i="0">
                 <a:solidFill>
                   <a:srgbClr val="333333"/>
                 </a:solidFill>
@@ -7689,7 +7689,7 @@
               <a:t>. Modalidad: </a:t>
             </a:r>
             <a:r>
-              <a:rPr sz="1600" b="1" i="0">
+              <a:rPr sz="2000" b="1" i="0">
                 <a:solidFill>
                   <a:srgbClr val="333333"/>
                 </a:solidFill>
@@ -7698,7 +7698,7 @@
               <a:t>Virtual</a:t>
             </a:r>
             <a:r>
-              <a:rPr sz="1600" b="0" i="0">
+              <a:rPr sz="2000" b="0" i="0">
                 <a:solidFill>
                   <a:srgbClr val="333333"/>
                 </a:solidFill>
@@ -7707,7 +7707,7 @@
               <a:t>: todas las sesiones son </a:t>
             </a:r>
             <a:r>
-              <a:rPr sz="1600" b="1" i="0">
+              <a:rPr sz="2000" b="1" i="0">
                 <a:solidFill>
                   <a:srgbClr val="333333"/>
                 </a:solidFill>
@@ -7716,7 +7716,7 @@
               <a:t>virtual síncrona</a:t>
             </a:r>
             <a:r>
-              <a:rPr sz="1600" b="0" i="0">
+              <a:rPr sz="2000" b="0" i="0">
                 <a:solidFill>
                   <a:srgbClr val="333333"/>
                 </a:solidFill>
@@ -7725,7 +7725,7 @@
               <a:t> por Google Meet, incluidos la Sesión 1 y los parciales; festivos = </a:t>
             </a:r>
             <a:r>
-              <a:rPr sz="1600" b="1" i="0">
+              <a:rPr sz="2000" b="1" i="0">
                 <a:solidFill>
                   <a:srgbClr val="333333"/>
                 </a:solidFill>
@@ -7734,7 +7734,7 @@
               <a:t>clase autónoma</a:t>
             </a:r>
             <a:r>
-              <a:rPr sz="1600" b="0" i="0">
+              <a:rPr sz="2000" b="0" i="0">
                 <a:solidFill>
                   <a:srgbClr val="333333"/>
                 </a:solidFill>
@@ -7750,7 +7750,7 @@
               </a:spcAft>
             </a:pPr>
             <a:r>
-              <a:rPr sz="1600" b="0" i="0">
+              <a:rPr sz="2000" b="0" i="0">
                 <a:solidFill>
                   <a:srgbClr val="333333"/>
                 </a:solidFill>
@@ -7759,7 +7759,7 @@
               <a:t>–   Talleres y quices/parciales se entregan/presentan en </a:t>
             </a:r>
             <a:r>
-              <a:rPr sz="1600" b="1" i="0">
+              <a:rPr sz="2000" b="1" i="0">
                 <a:solidFill>
                   <a:srgbClr val="333333"/>
                 </a:solidFill>
@@ -7768,7 +7768,7 @@
               <a:t>ExamLab</a:t>
             </a:r>
             <a:r>
-              <a:rPr sz="1600" b="0" i="0">
+              <a:rPr sz="2000" b="0" i="0">
                 <a:solidFill>
                   <a:srgbClr val="333333"/>
                 </a:solidFill>
@@ -7777,7 +7777,7 @@
               <a:t> (https://uniaj.examlab.workers.dev/) — no es la plataforma oficial de la UNIAJC, la usamos solo para esto. Taller calificable: entrega máxima el </a:t>
             </a:r>
             <a:r>
-              <a:rPr sz="1600" b="1" i="0">
+              <a:rPr sz="2000" b="1" i="0">
                 <a:solidFill>
                   <a:srgbClr val="333333"/>
                 </a:solidFill>
@@ -7786,7 +7786,7 @@
               <a:t>domingo 23:59</a:t>
             </a:r>
             <a:r>
-              <a:rPr sz="1600" b="0" i="0">
+              <a:rPr sz="2000" b="0" i="0">
                 <a:solidFill>
                   <a:srgbClr val="333333"/>
                 </a:solidFill>
@@ -7802,7 +7802,7 @@
               </a:spcAft>
             </a:pPr>
             <a:r>
-              <a:rPr sz="1600" b="0" i="0">
+              <a:rPr sz="2000" b="0" i="0">
                 <a:solidFill>
                   <a:srgbClr val="333333"/>
                 </a:solidFill>
@@ -7811,7 +7811,7 @@
               <a:t>–   Hilo conductor de todo el semestre: </a:t>
             </a:r>
             <a:r>
-              <a:rPr sz="1600" b="1" i="0">
+              <a:rPr sz="2000" b="1" i="0">
                 <a:solidFill>
                   <a:srgbClr val="333333"/>
                 </a:solidFill>
@@ -7820,7 +7820,7 @@
               <a:t>Proyecto Integrador</a:t>
             </a:r>
             <a:r>
-              <a:rPr sz="1600" b="0" i="0">
+              <a:rPr sz="2000" b="0" i="0">
                 <a:solidFill>
                   <a:srgbClr val="333333"/>
                 </a:solidFill>
@@ -9867,7 +9867,7 @@
               </a:spcAft>
             </a:pPr>
             <a:r>
-              <a:rPr sz="1600" b="0" i="0">
+              <a:rPr sz="2000" b="0" i="0">
                 <a:solidFill>
                   <a:srgbClr val="333333"/>
                 </a:solidFill>
@@ -9876,7 +9876,7 @@
               <a:t>–   Una aplicación completa que integre </a:t>
             </a:r>
             <a:r>
-              <a:rPr sz="1600" b="1" i="0">
+              <a:rPr sz="2000" b="1" i="0">
                 <a:solidFill>
                   <a:srgbClr val="333333"/>
                 </a:solidFill>
@@ -9885,7 +9885,7 @@
               <a:t>estructuras de datos</a:t>
             </a:r>
             <a:r>
-              <a:rPr sz="1600" b="0" i="0">
+              <a:rPr sz="2000" b="0" i="0">
                 <a:solidFill>
                   <a:srgbClr val="333333"/>
                 </a:solidFill>
@@ -9894,7 +9894,7 @@
               <a:t>, </a:t>
             </a:r>
             <a:r>
-              <a:rPr sz="1600" b="1" i="0">
+              <a:rPr sz="2000" b="1" i="0">
                 <a:solidFill>
                   <a:srgbClr val="333333"/>
                 </a:solidFill>
@@ -9903,7 +9903,7 @@
               <a:t>GUI/eventos</a:t>
             </a:r>
             <a:r>
-              <a:rPr sz="1600" b="0" i="0">
+              <a:rPr sz="2000" b="0" i="0">
                 <a:solidFill>
                   <a:srgbClr val="333333"/>
                 </a:solidFill>
@@ -9912,7 +9912,7 @@
               <a:t> y </a:t>
             </a:r>
             <a:r>
-              <a:rPr sz="1600" b="1" i="0">
+              <a:rPr sz="2000" b="1" i="0">
                 <a:solidFill>
                   <a:srgbClr val="333333"/>
                 </a:solidFill>
@@ -9921,7 +9921,7 @@
               <a:t>patrones</a:t>
             </a:r>
             <a:r>
-              <a:rPr sz="1600" b="0" i="0">
+              <a:rPr sz="2000" b="0" i="0">
                 <a:solidFill>
                   <a:srgbClr val="333333"/>
                 </a:solidFill>
@@ -9937,7 +9937,7 @@
               </a:spcAft>
             </a:pPr>
             <a:r>
-              <a:rPr sz="1600" b="0" i="0">
+              <a:rPr sz="2000" b="0" i="0">
                 <a:solidFill>
                   <a:srgbClr val="333333"/>
                 </a:solidFill>
@@ -9953,7 +9953,7 @@
               </a:spcAft>
             </a:pPr>
             <a:r>
-              <a:rPr sz="1600" b="0" i="0">
+              <a:rPr sz="2000" b="0" i="0">
                 <a:solidFill>
                   <a:srgbClr val="333333"/>
                 </a:solidFill>
@@ -9962,7 +9962,7 @@
               <a:t>–   Se construye por avances a lo largo del semestre; pesa </a:t>
             </a:r>
             <a:r>
-              <a:rPr sz="1600" b="1" i="0">
+              <a:rPr sz="2000" b="1" i="0">
                 <a:solidFill>
                   <a:srgbClr val="333333"/>
                 </a:solidFill>
@@ -9971,7 +9971,7 @@
               <a:t>20%</a:t>
             </a:r>
             <a:r>
-              <a:rPr sz="1600" b="0" i="0">
+              <a:rPr sz="2000" b="0" i="0">
                 <a:solidFill>
                   <a:srgbClr val="333333"/>
                 </a:solidFill>
@@ -9987,7 +9987,7 @@
               </a:spcAft>
             </a:pPr>
             <a:r>
-              <a:rPr sz="1600" b="0" i="0">
+              <a:rPr sz="2000" b="0" i="0">
                 <a:solidFill>
                   <a:srgbClr val="333333"/>
                 </a:solidFill>

--- a/Programacion II/Clases/Presentacion del Curso - Programacion II.pptx
+++ b/Programacion II/Clases/Presentacion del Curso - Programacion II.pptx
@@ -3597,7 +3597,25 @@
                 </a:solidFill>
                 <a:latin typeface="Calibri"/>
               </a:rPr>
-              <a:t>–   IDE recomendado: IntelliJ IDEA / VS Code / NetBeans (Java 17+).</a:t>
+              <a:t>–   IDE del curso: </a:t>
+            </a:r>
+            <a:r>
+              <a:rPr sz="2000" b="1" i="0">
+                <a:solidFill>
+                  <a:srgbClr val="333333"/>
+                </a:solidFill>
+                <a:latin typeface="Calibri"/>
+              </a:rPr>
+              <a:t>Visual Studio Code</a:t>
+            </a:r>
+            <a:r>
+              <a:rPr sz="2000" b="0" i="0">
+                <a:solidFill>
+                  <a:srgbClr val="333333"/>
+                </a:solidFill>
+                <a:latin typeface="Calibri"/>
+              </a:rPr>
+              <a:t> con el Extension Pack for Java (JDK 17+).</a:t>
             </a:r>
           </a:p>
           <a:p>
@@ -5019,7 +5037,211 @@
       </p:sp>
       <p:pic>
         <p:nvPicPr>
-          <p:cNvPr id="19" name="Picture 18" descr="netbeans.png"/>
+          <p:cNvPr id="19" name="Picture 18" descr="vscode.png"/>
+          <p:cNvPicPr>
+            <a:picLocks noChangeAspect="1"/>
+          </p:cNvPicPr>
+          <p:nvPr/>
+        </p:nvPicPr>
+        <p:blipFill>
+          <a:blip r:embed="rId3"/>
+          <a:stretch>
+            <a:fillRect/>
+          </a:stretch>
+        </p:blipFill>
+        <p:spPr>
+          <a:xfrm>
+            <a:off x="9311640" y="1847087"/>
+            <a:ext cx="1220724" cy="1220724"/>
+          </a:xfrm>
+          <a:prstGeom prst="rect">
+            <a:avLst/>
+          </a:prstGeom>
+        </p:spPr>
+      </p:pic>
+      <p:sp>
+        <p:nvSpPr>
+          <p:cNvPr id="20" name="TextBox 19"/>
+          <p:cNvSpPr txBox="1"/>
+          <p:nvPr/>
+        </p:nvSpPr>
+        <p:spPr>
+          <a:xfrm>
+            <a:off x="8182660" y="3159251"/>
+            <a:ext cx="3478682" cy="621792"/>
+          </a:xfrm>
+          <a:prstGeom prst="rect">
+            <a:avLst/>
+          </a:prstGeom>
+          <a:noFill/>
+        </p:spPr>
+        <p:txBody>
+          <a:bodyPr wrap="square" anchor="t"/>
+          <a:lstStyle/>
+          <a:p>
+            <a:pPr algn="ctr"/>
+            <a:r>
+              <a:rPr sz="1300" b="1" i="0">
+                <a:solidFill>
+                  <a:srgbClr val="095292"/>
+                </a:solidFill>
+                <a:latin typeface="Calibri"/>
+              </a:rPr>
+              <a:t>Visual Studio Code</a:t>
+            </a:r>
+          </a:p>
+          <a:p>
+            <a:pPr algn="ctr">
+              <a:spcBef>
+                <a:spcPts val="200"/>
+              </a:spcBef>
+            </a:pPr>
+            <a:r>
+              <a:rPr sz="1000" b="0" i="0">
+                <a:solidFill>
+                  <a:srgbClr val="666666"/>
+                </a:solidFill>
+                <a:latin typeface="Calibri"/>
+              </a:rPr>
+              <a:t>IDE del curso (Extension Pack for Java)</a:t>
+            </a:r>
+          </a:p>
+        </p:txBody>
+      </p:sp>
+      <p:sp>
+        <p:nvSpPr>
+          <p:cNvPr id="21" name="Rounded Rectangle 20"/>
+          <p:cNvSpPr/>
+          <p:nvPr/>
+        </p:nvSpPr>
+        <p:spPr>
+          <a:xfrm>
+            <a:off x="2370277" y="4055364"/>
+            <a:ext cx="3624986" cy="2299716"/>
+          </a:xfrm>
+          <a:prstGeom prst="roundRect">
+            <a:avLst>
+              <a:gd name="adj" fmla="val 12000"/>
+            </a:avLst>
+          </a:prstGeom>
+          <a:solidFill>
+            <a:srgbClr val="F2F2F2"/>
+          </a:solidFill>
+          <a:ln>
+            <a:noFill/>
+          </a:ln>
+        </p:spPr>
+        <p:style>
+          <a:lnRef idx="1">
+            <a:schemeClr val="accent1"/>
+          </a:lnRef>
+          <a:fillRef idx="3">
+            <a:schemeClr val="accent1"/>
+          </a:fillRef>
+          <a:effectRef idx="2">
+            <a:schemeClr val="accent1"/>
+          </a:effectRef>
+          <a:fontRef idx="minor">
+            <a:schemeClr val="lt1"/>
+          </a:fontRef>
+        </p:style>
+        <p:txBody>
+          <a:bodyPr rtlCol="0" anchor="ctr"/>
+          <a:lstStyle/>
+          <a:p>
+            <a:pPr algn="ctr"/>
+          </a:p>
+        </p:txBody>
+      </p:sp>
+      <p:sp>
+        <p:nvSpPr>
+          <p:cNvPr id="22" name="Rectangle 21"/>
+          <p:cNvSpPr/>
+          <p:nvPr/>
+        </p:nvSpPr>
+        <p:spPr>
+          <a:xfrm>
+            <a:off x="2370277" y="4055364"/>
+            <a:ext cx="3624986" cy="64008"/>
+          </a:xfrm>
+          <a:prstGeom prst="rect">
+            <a:avLst/>
+          </a:prstGeom>
+          <a:solidFill>
+            <a:srgbClr val="095292"/>
+          </a:solidFill>
+          <a:ln>
+            <a:noFill/>
+          </a:ln>
+        </p:spPr>
+        <p:style>
+          <a:lnRef idx="1">
+            <a:schemeClr val="accent1"/>
+          </a:lnRef>
+          <a:fillRef idx="3">
+            <a:schemeClr val="accent1"/>
+          </a:fillRef>
+          <a:effectRef idx="2">
+            <a:schemeClr val="accent1"/>
+          </a:effectRef>
+          <a:fontRef idx="minor">
+            <a:schemeClr val="lt1"/>
+          </a:fontRef>
+        </p:style>
+        <p:txBody>
+          <a:bodyPr rtlCol="0" anchor="ctr"/>
+          <a:lstStyle/>
+          <a:p>
+            <a:pPr algn="ctr"/>
+          </a:p>
+        </p:txBody>
+      </p:sp>
+      <p:sp>
+        <p:nvSpPr>
+          <p:cNvPr id="23" name="Rectangle 22"/>
+          <p:cNvSpPr/>
+          <p:nvPr/>
+        </p:nvSpPr>
+        <p:spPr>
+          <a:xfrm>
+            <a:off x="2370277" y="4119372"/>
+            <a:ext cx="3624986" cy="27432"/>
+          </a:xfrm>
+          <a:prstGeom prst="rect">
+            <a:avLst/>
+          </a:prstGeom>
+          <a:solidFill>
+            <a:srgbClr val="FFD000"/>
+          </a:solidFill>
+          <a:ln>
+            <a:noFill/>
+          </a:ln>
+        </p:spPr>
+        <p:style>
+          <a:lnRef idx="1">
+            <a:schemeClr val="accent1"/>
+          </a:lnRef>
+          <a:fillRef idx="3">
+            <a:schemeClr val="accent1"/>
+          </a:fillRef>
+          <a:effectRef idx="2">
+            <a:schemeClr val="accent1"/>
+          </a:effectRef>
+          <a:fontRef idx="minor">
+            <a:schemeClr val="lt1"/>
+          </a:fontRef>
+        </p:style>
+        <p:txBody>
+          <a:bodyPr rtlCol="0" anchor="ctr"/>
+          <a:lstStyle/>
+          <a:p>
+            <a:pPr algn="ctr"/>
+          </a:p>
+        </p:txBody>
+      </p:sp>
+      <p:pic>
+        <p:nvPicPr>
+          <p:cNvPr id="24" name="Picture 23" descr="java.png"/>
           <p:cNvPicPr>
             <a:picLocks noChangeAspect="1"/>
           </p:cNvPicPr>
@@ -5033,7 +5255,7 @@
         </p:blipFill>
         <p:spPr>
           <a:xfrm>
-            <a:off x="9311640" y="1847087"/>
+            <a:off x="3572408" y="4311396"/>
             <a:ext cx="1220724" cy="1220724"/>
           </a:xfrm>
           <a:prstGeom prst="rect">
@@ -5043,13 +5265,13 @@
       </p:pic>
       <p:sp>
         <p:nvSpPr>
-          <p:cNvPr id="20" name="TextBox 19"/>
+          <p:cNvPr id="25" name="TextBox 24"/>
           <p:cNvSpPr txBox="1"/>
           <p:nvPr/>
         </p:nvSpPr>
         <p:spPr>
           <a:xfrm>
-            <a:off x="8182660" y="3159251"/>
+            <a:off x="2443429" y="5623560"/>
             <a:ext cx="3478682" cy="621792"/>
           </a:xfrm>
           <a:prstGeom prst="rect">
@@ -5069,7 +5291,7 @@
                 </a:solidFill>
                 <a:latin typeface="Calibri"/>
               </a:rPr>
-              <a:t>NetBeans</a:t>
+              <a:t>Java</a:t>
             </a:r>
           </a:p>
           <a:p>
@@ -5085,20 +5307,20 @@
                 </a:solidFill>
                 <a:latin typeface="Calibri"/>
               </a:rPr>
-              <a:t>IDE alterno</a:t>
-            </a:r>
-          </a:p>
-        </p:txBody>
-      </p:sp>
-      <p:sp>
-        <p:nvSpPr>
-          <p:cNvPr id="21" name="Rounded Rectangle 20"/>
+              <a:t>JDK 17+</a:t>
+            </a:r>
+          </a:p>
+        </p:txBody>
+      </p:sp>
+      <p:sp>
+        <p:nvSpPr>
+          <p:cNvPr id="26" name="Rounded Rectangle 25"/>
           <p:cNvSpPr/>
           <p:nvPr/>
         </p:nvSpPr>
         <p:spPr>
           <a:xfrm>
-            <a:off x="2370277" y="4055364"/>
+            <a:off x="6196431" y="4055364"/>
             <a:ext cx="3624986" cy="2299716"/>
           </a:xfrm>
           <a:prstGeom prst="roundRect">
@@ -5137,13 +5359,13 @@
       </p:sp>
       <p:sp>
         <p:nvSpPr>
-          <p:cNvPr id="22" name="Rectangle 21"/>
+          <p:cNvPr id="27" name="Rectangle 26"/>
           <p:cNvSpPr/>
           <p:nvPr/>
         </p:nvSpPr>
         <p:spPr>
           <a:xfrm>
-            <a:off x="2370277" y="4055364"/>
+            <a:off x="6196431" y="4055364"/>
             <a:ext cx="3624986" cy="64008"/>
           </a:xfrm>
           <a:prstGeom prst="rect">
@@ -5180,13 +5402,13 @@
       </p:sp>
       <p:sp>
         <p:nvSpPr>
-          <p:cNvPr id="23" name="Rectangle 22"/>
+          <p:cNvPr id="28" name="Rectangle 27"/>
           <p:cNvSpPr/>
           <p:nvPr/>
         </p:nvSpPr>
         <p:spPr>
           <a:xfrm>
-            <a:off x="2370277" y="4119372"/>
+            <a:off x="6196431" y="4119372"/>
             <a:ext cx="3624986" cy="27432"/>
           </a:xfrm>
           <a:prstGeom prst="rect">
@@ -5223,210 +5445,6 @@
       </p:sp>
       <p:pic>
         <p:nvPicPr>
-          <p:cNvPr id="24" name="Picture 23" descr="java.png"/>
-          <p:cNvPicPr>
-            <a:picLocks noChangeAspect="1"/>
-          </p:cNvPicPr>
-          <p:nvPr/>
-        </p:nvPicPr>
-        <p:blipFill>
-          <a:blip r:embed="rId5"/>
-          <a:stretch>
-            <a:fillRect/>
-          </a:stretch>
-        </p:blipFill>
-        <p:spPr>
-          <a:xfrm>
-            <a:off x="3572408" y="4311396"/>
-            <a:ext cx="1220724" cy="1220724"/>
-          </a:xfrm>
-          <a:prstGeom prst="rect">
-            <a:avLst/>
-          </a:prstGeom>
-        </p:spPr>
-      </p:pic>
-      <p:sp>
-        <p:nvSpPr>
-          <p:cNvPr id="25" name="TextBox 24"/>
-          <p:cNvSpPr txBox="1"/>
-          <p:nvPr/>
-        </p:nvSpPr>
-        <p:spPr>
-          <a:xfrm>
-            <a:off x="2443429" y="5623560"/>
-            <a:ext cx="3478682" cy="621792"/>
-          </a:xfrm>
-          <a:prstGeom prst="rect">
-            <a:avLst/>
-          </a:prstGeom>
-          <a:noFill/>
-        </p:spPr>
-        <p:txBody>
-          <a:bodyPr wrap="square" anchor="t"/>
-          <a:lstStyle/>
-          <a:p>
-            <a:pPr algn="ctr"/>
-            <a:r>
-              <a:rPr sz="1300" b="1" i="0">
-                <a:solidFill>
-                  <a:srgbClr val="095292"/>
-                </a:solidFill>
-                <a:latin typeface="Calibri"/>
-              </a:rPr>
-              <a:t>Java</a:t>
-            </a:r>
-          </a:p>
-          <a:p>
-            <a:pPr algn="ctr">
-              <a:spcBef>
-                <a:spcPts val="200"/>
-              </a:spcBef>
-            </a:pPr>
-            <a:r>
-              <a:rPr sz="1000" b="0" i="0">
-                <a:solidFill>
-                  <a:srgbClr val="666666"/>
-                </a:solidFill>
-                <a:latin typeface="Calibri"/>
-              </a:rPr>
-              <a:t>JDK 17+</a:t>
-            </a:r>
-          </a:p>
-        </p:txBody>
-      </p:sp>
-      <p:sp>
-        <p:nvSpPr>
-          <p:cNvPr id="26" name="Rounded Rectangle 25"/>
-          <p:cNvSpPr/>
-          <p:nvPr/>
-        </p:nvSpPr>
-        <p:spPr>
-          <a:xfrm>
-            <a:off x="6196431" y="4055364"/>
-            <a:ext cx="3624986" cy="2299716"/>
-          </a:xfrm>
-          <a:prstGeom prst="roundRect">
-            <a:avLst>
-              <a:gd name="adj" fmla="val 12000"/>
-            </a:avLst>
-          </a:prstGeom>
-          <a:solidFill>
-            <a:srgbClr val="F2F2F2"/>
-          </a:solidFill>
-          <a:ln>
-            <a:noFill/>
-          </a:ln>
-        </p:spPr>
-        <p:style>
-          <a:lnRef idx="1">
-            <a:schemeClr val="accent1"/>
-          </a:lnRef>
-          <a:fillRef idx="3">
-            <a:schemeClr val="accent1"/>
-          </a:fillRef>
-          <a:effectRef idx="2">
-            <a:schemeClr val="accent1"/>
-          </a:effectRef>
-          <a:fontRef idx="minor">
-            <a:schemeClr val="lt1"/>
-          </a:fontRef>
-        </p:style>
-        <p:txBody>
-          <a:bodyPr rtlCol="0" anchor="ctr"/>
-          <a:lstStyle/>
-          <a:p>
-            <a:pPr algn="ctr"/>
-          </a:p>
-        </p:txBody>
-      </p:sp>
-      <p:sp>
-        <p:nvSpPr>
-          <p:cNvPr id="27" name="Rectangle 26"/>
-          <p:cNvSpPr/>
-          <p:nvPr/>
-        </p:nvSpPr>
-        <p:spPr>
-          <a:xfrm>
-            <a:off x="6196431" y="4055364"/>
-            <a:ext cx="3624986" cy="64008"/>
-          </a:xfrm>
-          <a:prstGeom prst="rect">
-            <a:avLst/>
-          </a:prstGeom>
-          <a:solidFill>
-            <a:srgbClr val="095292"/>
-          </a:solidFill>
-          <a:ln>
-            <a:noFill/>
-          </a:ln>
-        </p:spPr>
-        <p:style>
-          <a:lnRef idx="1">
-            <a:schemeClr val="accent1"/>
-          </a:lnRef>
-          <a:fillRef idx="3">
-            <a:schemeClr val="accent1"/>
-          </a:fillRef>
-          <a:effectRef idx="2">
-            <a:schemeClr val="accent1"/>
-          </a:effectRef>
-          <a:fontRef idx="minor">
-            <a:schemeClr val="lt1"/>
-          </a:fontRef>
-        </p:style>
-        <p:txBody>
-          <a:bodyPr rtlCol="0" anchor="ctr"/>
-          <a:lstStyle/>
-          <a:p>
-            <a:pPr algn="ctr"/>
-          </a:p>
-        </p:txBody>
-      </p:sp>
-      <p:sp>
-        <p:nvSpPr>
-          <p:cNvPr id="28" name="Rectangle 27"/>
-          <p:cNvSpPr/>
-          <p:nvPr/>
-        </p:nvSpPr>
-        <p:spPr>
-          <a:xfrm>
-            <a:off x="6196431" y="4119372"/>
-            <a:ext cx="3624986" cy="27432"/>
-          </a:xfrm>
-          <a:prstGeom prst="rect">
-            <a:avLst/>
-          </a:prstGeom>
-          <a:solidFill>
-            <a:srgbClr val="FFD000"/>
-          </a:solidFill>
-          <a:ln>
-            <a:noFill/>
-          </a:ln>
-        </p:spPr>
-        <p:style>
-          <a:lnRef idx="1">
-            <a:schemeClr val="accent1"/>
-          </a:lnRef>
-          <a:fillRef idx="3">
-            <a:schemeClr val="accent1"/>
-          </a:fillRef>
-          <a:effectRef idx="2">
-            <a:schemeClr val="accent1"/>
-          </a:effectRef>
-          <a:fontRef idx="minor">
-            <a:schemeClr val="lt1"/>
-          </a:fontRef>
-        </p:style>
-        <p:txBody>
-          <a:bodyPr rtlCol="0" anchor="ctr"/>
-          <a:lstStyle/>
-          <a:p>
-            <a:pPr algn="ctr"/>
-          </a:p>
-        </p:txBody>
-      </p:sp>
-      <p:pic>
-        <p:nvPicPr>
           <p:cNvPr id="29" name="Picture 28" descr="examlab.png"/>
           <p:cNvPicPr>
             <a:picLocks noChangeAspect="1"/>
@@ -5434,7 +5452,7 @@
           <p:nvPr/>
         </p:nvPicPr>
         <p:blipFill>
-          <a:blip r:embed="rId6"/>
+          <a:blip r:embed="rId5"/>
           <a:stretch>
             <a:fillRect/>
           </a:stretch>
